--- a/ml_1/week_7/multiclass&calibration.pptx
+++ b/ml_1/week_7/multiclass&calibration.pptx
@@ -5,7 +5,7 @@
     <p:sldMasterId id="2147483648" r:id="rId1"/>
   </p:sldMasterIdLst>
   <p:notesMasterIdLst>
-    <p:notesMasterId r:id="rId25"/>
+    <p:notesMasterId r:id="rId30"/>
   </p:notesMasterIdLst>
   <p:sldIdLst>
     <p:sldId id="256" r:id="rId2"/>
@@ -27,10 +27,15 @@
     <p:sldId id="303" r:id="rId18"/>
     <p:sldId id="305" r:id="rId19"/>
     <p:sldId id="304" r:id="rId20"/>
-    <p:sldId id="262" r:id="rId21"/>
-    <p:sldId id="306" r:id="rId22"/>
-    <p:sldId id="307" r:id="rId23"/>
-    <p:sldId id="308" r:id="rId24"/>
+    <p:sldId id="309" r:id="rId21"/>
+    <p:sldId id="310" r:id="rId22"/>
+    <p:sldId id="312" r:id="rId23"/>
+    <p:sldId id="311" r:id="rId24"/>
+    <p:sldId id="262" r:id="rId25"/>
+    <p:sldId id="306" r:id="rId26"/>
+    <p:sldId id="307" r:id="rId27"/>
+    <p:sldId id="308" r:id="rId28"/>
+    <p:sldId id="313" r:id="rId29"/>
   </p:sldIdLst>
   <p:sldSz cx="12192000" cy="6858000"/>
   <p:notesSz cx="6858000" cy="9144000"/>
@@ -219,7 +224,7 @@
           <a:p>
             <a:fld id="{33BEBF00-5E8D-264A-97EB-3271BEE203CE}" type="datetimeFigureOut">
               <a:rPr lang="ru-GB" smtClean="0"/>
-              <a:t>09/03/2026</a:t>
+              <a:t>3/12/26</a:t>
             </a:fld>
             <a:endParaRPr lang="ru-GB"/>
           </a:p>
@@ -1443,7 +1448,7 @@
         <p:cNvPr id="1" name="">
           <a:extLst>
             <a:ext uri="{FF2B5EF4-FFF2-40B4-BE49-F238E27FC236}">
-              <a16:creationId xmlns:a16="http://schemas.microsoft.com/office/drawing/2014/main" id="{70F4E403-C8C7-29A6-5577-338F8D28AFBD}"/>
+              <a16:creationId xmlns:a16="http://schemas.microsoft.com/office/drawing/2014/main" id="{3A141FD3-25F4-7302-0A76-B2779592012B}"/>
             </a:ext>
           </a:extLst>
         </p:cNvPr>
@@ -1463,7 +1468,7 @@
           <p:cNvPr id="2" name="Образ слайда 1">
             <a:extLst>
               <a:ext uri="{FF2B5EF4-FFF2-40B4-BE49-F238E27FC236}">
-                <a16:creationId xmlns:a16="http://schemas.microsoft.com/office/drawing/2014/main" id="{745FC44E-701F-5B13-8FDD-6396E1441EDF}"/>
+                <a16:creationId xmlns:a16="http://schemas.microsoft.com/office/drawing/2014/main" id="{D21C5089-6F6D-0B03-804D-13C15072ED48}"/>
               </a:ext>
             </a:extLst>
           </p:cNvPr>
@@ -1481,7 +1486,7 @@
           <p:cNvPr id="3" name="Заметки 2">
             <a:extLst>
               <a:ext uri="{FF2B5EF4-FFF2-40B4-BE49-F238E27FC236}">
-                <a16:creationId xmlns:a16="http://schemas.microsoft.com/office/drawing/2014/main" id="{7D154850-58CB-F6CD-5884-2D33250BE280}"/>
+                <a16:creationId xmlns:a16="http://schemas.microsoft.com/office/drawing/2014/main" id="{E892B6DC-8C57-EC12-D294-DE32479E1FEC}"/>
               </a:ext>
             </a:extLst>
           </p:cNvPr>
@@ -1506,7 +1511,7 @@
           <p:cNvPr id="4" name="Номер слайда 3">
             <a:extLst>
               <a:ext uri="{FF2B5EF4-FFF2-40B4-BE49-F238E27FC236}">
-                <a16:creationId xmlns:a16="http://schemas.microsoft.com/office/drawing/2014/main" id="{77F05238-7133-77FE-5D15-D3B2779C46A0}"/>
+                <a16:creationId xmlns:a16="http://schemas.microsoft.com/office/drawing/2014/main" id="{18E69BA3-1D38-83C2-C065-7FD8AD946ED1}"/>
               </a:ext>
             </a:extLst>
           </p:cNvPr>
@@ -1533,7 +1538,7 @@
     </p:spTree>
     <p:extLst>
       <p:ext uri="{BB962C8B-B14F-4D97-AF65-F5344CB8AC3E}">
-        <p14:creationId xmlns:p14="http://schemas.microsoft.com/office/powerpoint/2010/main" val="1414573935"/>
+        <p14:creationId xmlns:p14="http://schemas.microsoft.com/office/powerpoint/2010/main" val="2094804147"/>
       </p:ext>
     </p:extLst>
   </p:cSld>
@@ -1551,7 +1556,7 @@
         <p:cNvPr id="1" name="">
           <a:extLst>
             <a:ext uri="{FF2B5EF4-FFF2-40B4-BE49-F238E27FC236}">
-              <a16:creationId xmlns:a16="http://schemas.microsoft.com/office/drawing/2014/main" id="{5E7E5737-8E5A-2C94-4761-373FC0E16075}"/>
+              <a16:creationId xmlns:a16="http://schemas.microsoft.com/office/drawing/2014/main" id="{6EBB8C68-575D-4164-48B8-EE3393AAE1E6}"/>
             </a:ext>
           </a:extLst>
         </p:cNvPr>
@@ -1571,7 +1576,7 @@
           <p:cNvPr id="2" name="Образ слайда 1">
             <a:extLst>
               <a:ext uri="{FF2B5EF4-FFF2-40B4-BE49-F238E27FC236}">
-                <a16:creationId xmlns:a16="http://schemas.microsoft.com/office/drawing/2014/main" id="{AA2CC640-A9B4-D168-C232-E49A149C6658}"/>
+                <a16:creationId xmlns:a16="http://schemas.microsoft.com/office/drawing/2014/main" id="{7BA749AB-5527-BB9B-5449-6F03E6C3264D}"/>
               </a:ext>
             </a:extLst>
           </p:cNvPr>
@@ -1589,7 +1594,7 @@
           <p:cNvPr id="3" name="Заметки 2">
             <a:extLst>
               <a:ext uri="{FF2B5EF4-FFF2-40B4-BE49-F238E27FC236}">
-                <a16:creationId xmlns:a16="http://schemas.microsoft.com/office/drawing/2014/main" id="{318DB295-DF82-5C93-E773-72E3499C5F24}"/>
+                <a16:creationId xmlns:a16="http://schemas.microsoft.com/office/drawing/2014/main" id="{E0B5DECC-1D24-8B87-95DA-9E0E68F7E579}"/>
               </a:ext>
             </a:extLst>
           </p:cNvPr>
@@ -1614,7 +1619,7 @@
           <p:cNvPr id="4" name="Номер слайда 3">
             <a:extLst>
               <a:ext uri="{FF2B5EF4-FFF2-40B4-BE49-F238E27FC236}">
-                <a16:creationId xmlns:a16="http://schemas.microsoft.com/office/drawing/2014/main" id="{6FC617B1-B3D1-47E9-9259-50C5CC583023}"/>
+                <a16:creationId xmlns:a16="http://schemas.microsoft.com/office/drawing/2014/main" id="{DE1A9B4C-DF64-5372-96C1-653BF7F4EECB}"/>
               </a:ext>
             </a:extLst>
           </p:cNvPr>
@@ -1641,7 +1646,7 @@
     </p:spTree>
     <p:extLst>
       <p:ext uri="{BB962C8B-B14F-4D97-AF65-F5344CB8AC3E}">
-        <p14:creationId xmlns:p14="http://schemas.microsoft.com/office/powerpoint/2010/main" val="3700016073"/>
+        <p14:creationId xmlns:p14="http://schemas.microsoft.com/office/powerpoint/2010/main" val="1560887191"/>
       </p:ext>
     </p:extLst>
   </p:cSld>
@@ -1767,6 +1772,438 @@
         <p:cNvPr id="1" name="">
           <a:extLst>
             <a:ext uri="{FF2B5EF4-FFF2-40B4-BE49-F238E27FC236}">
+              <a16:creationId xmlns:a16="http://schemas.microsoft.com/office/drawing/2014/main" id="{4F65FBF7-6799-8A04-C995-3D12E7E9E1ED}"/>
+            </a:ext>
+          </a:extLst>
+        </p:cNvPr>
+        <p:cNvGrpSpPr/>
+        <p:nvPr/>
+      </p:nvGrpSpPr>
+      <p:grpSpPr>
+        <a:xfrm>
+          <a:off x="0" y="0"/>
+          <a:ext cx="0" cy="0"/>
+          <a:chOff x="0" y="0"/>
+          <a:chExt cx="0" cy="0"/>
+        </a:xfrm>
+      </p:grpSpPr>
+      <p:sp>
+        <p:nvSpPr>
+          <p:cNvPr id="2" name="Образ слайда 1">
+            <a:extLst>
+              <a:ext uri="{FF2B5EF4-FFF2-40B4-BE49-F238E27FC236}">
+                <a16:creationId xmlns:a16="http://schemas.microsoft.com/office/drawing/2014/main" id="{9C3E103F-C9A1-08D7-4D10-0955216B5F5C}"/>
+              </a:ext>
+            </a:extLst>
+          </p:cNvPr>
+          <p:cNvSpPr>
+            <a:spLocks noGrp="1" noRot="1" noChangeAspect="1"/>
+          </p:cNvSpPr>
+          <p:nvPr>
+            <p:ph type="sldImg"/>
+          </p:nvPr>
+        </p:nvSpPr>
+        <p:spPr/>
+      </p:sp>
+      <p:sp>
+        <p:nvSpPr>
+          <p:cNvPr id="3" name="Заметки 2">
+            <a:extLst>
+              <a:ext uri="{FF2B5EF4-FFF2-40B4-BE49-F238E27FC236}">
+                <a16:creationId xmlns:a16="http://schemas.microsoft.com/office/drawing/2014/main" id="{BC0CA8F6-B6F6-2491-2D46-1519A1FCA24D}"/>
+              </a:ext>
+            </a:extLst>
+          </p:cNvPr>
+          <p:cNvSpPr>
+            <a:spLocks noGrp="1"/>
+          </p:cNvSpPr>
+          <p:nvPr>
+            <p:ph type="body" idx="1"/>
+          </p:nvPr>
+        </p:nvSpPr>
+        <p:spPr/>
+        <p:txBody>
+          <a:bodyPr/>
+          <a:lstStyle/>
+          <a:p>
+            <a:endParaRPr lang="ru-GB" dirty="0"/>
+          </a:p>
+        </p:txBody>
+      </p:sp>
+      <p:sp>
+        <p:nvSpPr>
+          <p:cNvPr id="4" name="Номер слайда 3">
+            <a:extLst>
+              <a:ext uri="{FF2B5EF4-FFF2-40B4-BE49-F238E27FC236}">
+                <a16:creationId xmlns:a16="http://schemas.microsoft.com/office/drawing/2014/main" id="{BA24314C-DAFA-0BF0-285C-DE08DE5178E6}"/>
+              </a:ext>
+            </a:extLst>
+          </p:cNvPr>
+          <p:cNvSpPr>
+            <a:spLocks noGrp="1"/>
+          </p:cNvSpPr>
+          <p:nvPr>
+            <p:ph type="sldNum" sz="quarter" idx="5"/>
+          </p:nvPr>
+        </p:nvSpPr>
+        <p:spPr/>
+        <p:txBody>
+          <a:bodyPr/>
+          <a:lstStyle/>
+          <a:p>
+            <a:fld id="{CC7AE5BE-D43F-D646-9368-4EA0133E6314}" type="slidenum">
+              <a:rPr lang="ru-GB" smtClean="0"/>
+              <a:t>22</a:t>
+            </a:fld>
+            <a:endParaRPr lang="ru-GB"/>
+          </a:p>
+        </p:txBody>
+      </p:sp>
+    </p:spTree>
+    <p:extLst>
+      <p:ext uri="{BB962C8B-B14F-4D97-AF65-F5344CB8AC3E}">
+        <p14:creationId xmlns:p14="http://schemas.microsoft.com/office/powerpoint/2010/main" val="1681911557"/>
+      </p:ext>
+    </p:extLst>
+  </p:cSld>
+  <p:clrMapOvr>
+    <a:masterClrMapping/>
+  </p:clrMapOvr>
+</p:notes>
+</file>
+
+<file path=ppt/notesSlides/notesSlide21.xml><?xml version="1.0" encoding="utf-8"?>
+<p:notes xmlns:a="http://schemas.openxmlformats.org/drawingml/2006/main" xmlns:r="http://schemas.openxmlformats.org/officeDocument/2006/relationships" xmlns:p="http://schemas.openxmlformats.org/presentationml/2006/main">
+  <p:cSld>
+    <p:spTree>
+      <p:nvGrpSpPr>
+        <p:cNvPr id="1" name="">
+          <a:extLst>
+            <a:ext uri="{FF2B5EF4-FFF2-40B4-BE49-F238E27FC236}">
+              <a16:creationId xmlns:a16="http://schemas.microsoft.com/office/drawing/2014/main" id="{A335B171-45B3-06B2-1A75-91B04DEA3ADE}"/>
+            </a:ext>
+          </a:extLst>
+        </p:cNvPr>
+        <p:cNvGrpSpPr/>
+        <p:nvPr/>
+      </p:nvGrpSpPr>
+      <p:grpSpPr>
+        <a:xfrm>
+          <a:off x="0" y="0"/>
+          <a:ext cx="0" cy="0"/>
+          <a:chOff x="0" y="0"/>
+          <a:chExt cx="0" cy="0"/>
+        </a:xfrm>
+      </p:grpSpPr>
+      <p:sp>
+        <p:nvSpPr>
+          <p:cNvPr id="2" name="Образ слайда 1">
+            <a:extLst>
+              <a:ext uri="{FF2B5EF4-FFF2-40B4-BE49-F238E27FC236}">
+                <a16:creationId xmlns:a16="http://schemas.microsoft.com/office/drawing/2014/main" id="{2DA23FC7-A6AE-A9E7-CDF4-5705398BE6CA}"/>
+              </a:ext>
+            </a:extLst>
+          </p:cNvPr>
+          <p:cNvSpPr>
+            <a:spLocks noGrp="1" noRot="1" noChangeAspect="1"/>
+          </p:cNvSpPr>
+          <p:nvPr>
+            <p:ph type="sldImg"/>
+          </p:nvPr>
+        </p:nvSpPr>
+        <p:spPr/>
+      </p:sp>
+      <p:sp>
+        <p:nvSpPr>
+          <p:cNvPr id="3" name="Заметки 2">
+            <a:extLst>
+              <a:ext uri="{FF2B5EF4-FFF2-40B4-BE49-F238E27FC236}">
+                <a16:creationId xmlns:a16="http://schemas.microsoft.com/office/drawing/2014/main" id="{730B1B2A-5131-BFE0-F478-8ED37FCB1D55}"/>
+              </a:ext>
+            </a:extLst>
+          </p:cNvPr>
+          <p:cNvSpPr>
+            <a:spLocks noGrp="1"/>
+          </p:cNvSpPr>
+          <p:nvPr>
+            <p:ph type="body" idx="1"/>
+          </p:nvPr>
+        </p:nvSpPr>
+        <p:spPr/>
+        <p:txBody>
+          <a:bodyPr/>
+          <a:lstStyle/>
+          <a:p>
+            <a:endParaRPr lang="ru-GB" dirty="0"/>
+          </a:p>
+        </p:txBody>
+      </p:sp>
+      <p:sp>
+        <p:nvSpPr>
+          <p:cNvPr id="4" name="Номер слайда 3">
+            <a:extLst>
+              <a:ext uri="{FF2B5EF4-FFF2-40B4-BE49-F238E27FC236}">
+                <a16:creationId xmlns:a16="http://schemas.microsoft.com/office/drawing/2014/main" id="{0E61F39A-5F3F-3A5F-49BB-3F57D0493B9A}"/>
+              </a:ext>
+            </a:extLst>
+          </p:cNvPr>
+          <p:cNvSpPr>
+            <a:spLocks noGrp="1"/>
+          </p:cNvSpPr>
+          <p:nvPr>
+            <p:ph type="sldNum" sz="quarter" idx="5"/>
+          </p:nvPr>
+        </p:nvSpPr>
+        <p:spPr/>
+        <p:txBody>
+          <a:bodyPr/>
+          <a:lstStyle/>
+          <a:p>
+            <a:fld id="{CC7AE5BE-D43F-D646-9368-4EA0133E6314}" type="slidenum">
+              <a:rPr lang="ru-GB" smtClean="0"/>
+              <a:t>23</a:t>
+            </a:fld>
+            <a:endParaRPr lang="ru-GB"/>
+          </a:p>
+        </p:txBody>
+      </p:sp>
+    </p:spTree>
+    <p:extLst>
+      <p:ext uri="{BB962C8B-B14F-4D97-AF65-F5344CB8AC3E}">
+        <p14:creationId xmlns:p14="http://schemas.microsoft.com/office/powerpoint/2010/main" val="574511757"/>
+      </p:ext>
+    </p:extLst>
+  </p:cSld>
+  <p:clrMapOvr>
+    <a:masterClrMapping/>
+  </p:clrMapOvr>
+</p:notes>
+</file>
+
+<file path=ppt/notesSlides/notesSlide22.xml><?xml version="1.0" encoding="utf-8"?>
+<p:notes xmlns:a="http://schemas.openxmlformats.org/drawingml/2006/main" xmlns:r="http://schemas.openxmlformats.org/officeDocument/2006/relationships" xmlns:p="http://schemas.openxmlformats.org/presentationml/2006/main">
+  <p:cSld>
+    <p:spTree>
+      <p:nvGrpSpPr>
+        <p:cNvPr id="1" name="">
+          <a:extLst>
+            <a:ext uri="{FF2B5EF4-FFF2-40B4-BE49-F238E27FC236}">
+              <a16:creationId xmlns:a16="http://schemas.microsoft.com/office/drawing/2014/main" id="{70F4E403-C8C7-29A6-5577-338F8D28AFBD}"/>
+            </a:ext>
+          </a:extLst>
+        </p:cNvPr>
+        <p:cNvGrpSpPr/>
+        <p:nvPr/>
+      </p:nvGrpSpPr>
+      <p:grpSpPr>
+        <a:xfrm>
+          <a:off x="0" y="0"/>
+          <a:ext cx="0" cy="0"/>
+          <a:chOff x="0" y="0"/>
+          <a:chExt cx="0" cy="0"/>
+        </a:xfrm>
+      </p:grpSpPr>
+      <p:sp>
+        <p:nvSpPr>
+          <p:cNvPr id="2" name="Образ слайда 1">
+            <a:extLst>
+              <a:ext uri="{FF2B5EF4-FFF2-40B4-BE49-F238E27FC236}">
+                <a16:creationId xmlns:a16="http://schemas.microsoft.com/office/drawing/2014/main" id="{745FC44E-701F-5B13-8FDD-6396E1441EDF}"/>
+              </a:ext>
+            </a:extLst>
+          </p:cNvPr>
+          <p:cNvSpPr>
+            <a:spLocks noGrp="1" noRot="1" noChangeAspect="1"/>
+          </p:cNvSpPr>
+          <p:nvPr>
+            <p:ph type="sldImg"/>
+          </p:nvPr>
+        </p:nvSpPr>
+        <p:spPr/>
+      </p:sp>
+      <p:sp>
+        <p:nvSpPr>
+          <p:cNvPr id="3" name="Заметки 2">
+            <a:extLst>
+              <a:ext uri="{FF2B5EF4-FFF2-40B4-BE49-F238E27FC236}">
+                <a16:creationId xmlns:a16="http://schemas.microsoft.com/office/drawing/2014/main" id="{7D154850-58CB-F6CD-5884-2D33250BE280}"/>
+              </a:ext>
+            </a:extLst>
+          </p:cNvPr>
+          <p:cNvSpPr>
+            <a:spLocks noGrp="1"/>
+          </p:cNvSpPr>
+          <p:nvPr>
+            <p:ph type="body" idx="1"/>
+          </p:nvPr>
+        </p:nvSpPr>
+        <p:spPr/>
+        <p:txBody>
+          <a:bodyPr/>
+          <a:lstStyle/>
+          <a:p>
+            <a:endParaRPr lang="ru-GB" dirty="0"/>
+          </a:p>
+        </p:txBody>
+      </p:sp>
+      <p:sp>
+        <p:nvSpPr>
+          <p:cNvPr id="4" name="Номер слайда 3">
+            <a:extLst>
+              <a:ext uri="{FF2B5EF4-FFF2-40B4-BE49-F238E27FC236}">
+                <a16:creationId xmlns:a16="http://schemas.microsoft.com/office/drawing/2014/main" id="{77F05238-7133-77FE-5D15-D3B2779C46A0}"/>
+              </a:ext>
+            </a:extLst>
+          </p:cNvPr>
+          <p:cNvSpPr>
+            <a:spLocks noGrp="1"/>
+          </p:cNvSpPr>
+          <p:nvPr>
+            <p:ph type="sldNum" sz="quarter" idx="5"/>
+          </p:nvPr>
+        </p:nvSpPr>
+        <p:spPr/>
+        <p:txBody>
+          <a:bodyPr/>
+          <a:lstStyle/>
+          <a:p>
+            <a:fld id="{CC7AE5BE-D43F-D646-9368-4EA0133E6314}" type="slidenum">
+              <a:rPr lang="ru-GB" smtClean="0"/>
+              <a:t>24</a:t>
+            </a:fld>
+            <a:endParaRPr lang="ru-GB"/>
+          </a:p>
+        </p:txBody>
+      </p:sp>
+    </p:spTree>
+    <p:extLst>
+      <p:ext uri="{BB962C8B-B14F-4D97-AF65-F5344CB8AC3E}">
+        <p14:creationId xmlns:p14="http://schemas.microsoft.com/office/powerpoint/2010/main" val="1414573935"/>
+      </p:ext>
+    </p:extLst>
+  </p:cSld>
+  <p:clrMapOvr>
+    <a:masterClrMapping/>
+  </p:clrMapOvr>
+</p:notes>
+</file>
+
+<file path=ppt/notesSlides/notesSlide23.xml><?xml version="1.0" encoding="utf-8"?>
+<p:notes xmlns:a="http://schemas.openxmlformats.org/drawingml/2006/main" xmlns:r="http://schemas.openxmlformats.org/officeDocument/2006/relationships" xmlns:p="http://schemas.openxmlformats.org/presentationml/2006/main">
+  <p:cSld>
+    <p:spTree>
+      <p:nvGrpSpPr>
+        <p:cNvPr id="1" name="">
+          <a:extLst>
+            <a:ext uri="{FF2B5EF4-FFF2-40B4-BE49-F238E27FC236}">
+              <a16:creationId xmlns:a16="http://schemas.microsoft.com/office/drawing/2014/main" id="{5E7E5737-8E5A-2C94-4761-373FC0E16075}"/>
+            </a:ext>
+          </a:extLst>
+        </p:cNvPr>
+        <p:cNvGrpSpPr/>
+        <p:nvPr/>
+      </p:nvGrpSpPr>
+      <p:grpSpPr>
+        <a:xfrm>
+          <a:off x="0" y="0"/>
+          <a:ext cx="0" cy="0"/>
+          <a:chOff x="0" y="0"/>
+          <a:chExt cx="0" cy="0"/>
+        </a:xfrm>
+      </p:grpSpPr>
+      <p:sp>
+        <p:nvSpPr>
+          <p:cNvPr id="2" name="Образ слайда 1">
+            <a:extLst>
+              <a:ext uri="{FF2B5EF4-FFF2-40B4-BE49-F238E27FC236}">
+                <a16:creationId xmlns:a16="http://schemas.microsoft.com/office/drawing/2014/main" id="{AA2CC640-A9B4-D168-C232-E49A149C6658}"/>
+              </a:ext>
+            </a:extLst>
+          </p:cNvPr>
+          <p:cNvSpPr>
+            <a:spLocks noGrp="1" noRot="1" noChangeAspect="1"/>
+          </p:cNvSpPr>
+          <p:nvPr>
+            <p:ph type="sldImg"/>
+          </p:nvPr>
+        </p:nvSpPr>
+        <p:spPr/>
+      </p:sp>
+      <p:sp>
+        <p:nvSpPr>
+          <p:cNvPr id="3" name="Заметки 2">
+            <a:extLst>
+              <a:ext uri="{FF2B5EF4-FFF2-40B4-BE49-F238E27FC236}">
+                <a16:creationId xmlns:a16="http://schemas.microsoft.com/office/drawing/2014/main" id="{318DB295-DF82-5C93-E773-72E3499C5F24}"/>
+              </a:ext>
+            </a:extLst>
+          </p:cNvPr>
+          <p:cNvSpPr>
+            <a:spLocks noGrp="1"/>
+          </p:cNvSpPr>
+          <p:nvPr>
+            <p:ph type="body" idx="1"/>
+          </p:nvPr>
+        </p:nvSpPr>
+        <p:spPr/>
+        <p:txBody>
+          <a:bodyPr/>
+          <a:lstStyle/>
+          <a:p>
+            <a:endParaRPr lang="ru-GB" dirty="0"/>
+          </a:p>
+        </p:txBody>
+      </p:sp>
+      <p:sp>
+        <p:nvSpPr>
+          <p:cNvPr id="4" name="Номер слайда 3">
+            <a:extLst>
+              <a:ext uri="{FF2B5EF4-FFF2-40B4-BE49-F238E27FC236}">
+                <a16:creationId xmlns:a16="http://schemas.microsoft.com/office/drawing/2014/main" id="{6FC617B1-B3D1-47E9-9259-50C5CC583023}"/>
+              </a:ext>
+            </a:extLst>
+          </p:cNvPr>
+          <p:cNvSpPr>
+            <a:spLocks noGrp="1"/>
+          </p:cNvSpPr>
+          <p:nvPr>
+            <p:ph type="sldNum" sz="quarter" idx="5"/>
+          </p:nvPr>
+        </p:nvSpPr>
+        <p:spPr/>
+        <p:txBody>
+          <a:bodyPr/>
+          <a:lstStyle/>
+          <a:p>
+            <a:fld id="{CC7AE5BE-D43F-D646-9368-4EA0133E6314}" type="slidenum">
+              <a:rPr lang="ru-GB" smtClean="0"/>
+              <a:t>25</a:t>
+            </a:fld>
+            <a:endParaRPr lang="ru-GB"/>
+          </a:p>
+        </p:txBody>
+      </p:sp>
+    </p:spTree>
+    <p:extLst>
+      <p:ext uri="{BB962C8B-B14F-4D97-AF65-F5344CB8AC3E}">
+        <p14:creationId xmlns:p14="http://schemas.microsoft.com/office/powerpoint/2010/main" val="3700016073"/>
+      </p:ext>
+    </p:extLst>
+  </p:cSld>
+  <p:clrMapOvr>
+    <a:masterClrMapping/>
+  </p:clrMapOvr>
+</p:notes>
+</file>
+
+<file path=ppt/notesSlides/notesSlide24.xml><?xml version="1.0" encoding="utf-8"?>
+<p:notes xmlns:a="http://schemas.openxmlformats.org/drawingml/2006/main" xmlns:r="http://schemas.openxmlformats.org/officeDocument/2006/relationships" xmlns:p="http://schemas.openxmlformats.org/presentationml/2006/main">
+  <p:cSld>
+    <p:spTree>
+      <p:nvGrpSpPr>
+        <p:cNvPr id="1" name="">
+          <a:extLst>
+            <a:ext uri="{FF2B5EF4-FFF2-40B4-BE49-F238E27FC236}">
               <a16:creationId xmlns:a16="http://schemas.microsoft.com/office/drawing/2014/main" id="{1BD17758-478D-4ABF-9255-8BCD15018117}"/>
             </a:ext>
           </a:extLst>
@@ -1848,7 +2285,7 @@
           <a:p>
             <a:fld id="{CC7AE5BE-D43F-D646-9368-4EA0133E6314}" type="slidenum">
               <a:rPr lang="ru-GB" smtClean="0"/>
-              <a:t>22</a:t>
+              <a:t>26</a:t>
             </a:fld>
             <a:endParaRPr lang="ru-GB"/>
           </a:p>
@@ -1867,7 +2304,7 @@
 </p:notes>
 </file>
 
-<file path=ppt/notesSlides/notesSlide21.xml><?xml version="1.0" encoding="utf-8"?>
+<file path=ppt/notesSlides/notesSlide25.xml><?xml version="1.0" encoding="utf-8"?>
 <p:notes xmlns:a="http://schemas.openxmlformats.org/drawingml/2006/main" xmlns:r="http://schemas.openxmlformats.org/officeDocument/2006/relationships" xmlns:p="http://schemas.openxmlformats.org/presentationml/2006/main">
   <p:cSld>
     <p:spTree>
@@ -1956,7 +2393,7 @@
           <a:p>
             <a:fld id="{CC7AE5BE-D43F-D646-9368-4EA0133E6314}" type="slidenum">
               <a:rPr lang="ru-GB" smtClean="0"/>
-              <a:t>23</a:t>
+              <a:t>27</a:t>
             </a:fld>
             <a:endParaRPr lang="ru-GB"/>
           </a:p>
@@ -1966,6 +2403,114 @@
     <p:extLst>
       <p:ext uri="{BB962C8B-B14F-4D97-AF65-F5344CB8AC3E}">
         <p14:creationId xmlns:p14="http://schemas.microsoft.com/office/powerpoint/2010/main" val="295994039"/>
+      </p:ext>
+    </p:extLst>
+  </p:cSld>
+  <p:clrMapOvr>
+    <a:masterClrMapping/>
+  </p:clrMapOvr>
+</p:notes>
+</file>
+
+<file path=ppt/notesSlides/notesSlide26.xml><?xml version="1.0" encoding="utf-8"?>
+<p:notes xmlns:a="http://schemas.openxmlformats.org/drawingml/2006/main" xmlns:r="http://schemas.openxmlformats.org/officeDocument/2006/relationships" xmlns:p="http://schemas.openxmlformats.org/presentationml/2006/main">
+  <p:cSld>
+    <p:spTree>
+      <p:nvGrpSpPr>
+        <p:cNvPr id="1" name="">
+          <a:extLst>
+            <a:ext uri="{FF2B5EF4-FFF2-40B4-BE49-F238E27FC236}">
+              <a16:creationId xmlns:a16="http://schemas.microsoft.com/office/drawing/2014/main" id="{2E847330-1A2E-0F2D-BBFC-7B18F75B22D1}"/>
+            </a:ext>
+          </a:extLst>
+        </p:cNvPr>
+        <p:cNvGrpSpPr/>
+        <p:nvPr/>
+      </p:nvGrpSpPr>
+      <p:grpSpPr>
+        <a:xfrm>
+          <a:off x="0" y="0"/>
+          <a:ext cx="0" cy="0"/>
+          <a:chOff x="0" y="0"/>
+          <a:chExt cx="0" cy="0"/>
+        </a:xfrm>
+      </p:grpSpPr>
+      <p:sp>
+        <p:nvSpPr>
+          <p:cNvPr id="2" name="Образ слайда 1">
+            <a:extLst>
+              <a:ext uri="{FF2B5EF4-FFF2-40B4-BE49-F238E27FC236}">
+                <a16:creationId xmlns:a16="http://schemas.microsoft.com/office/drawing/2014/main" id="{8F522D8E-0C4C-AB0D-B0D2-B4E2A153B8E1}"/>
+              </a:ext>
+            </a:extLst>
+          </p:cNvPr>
+          <p:cNvSpPr>
+            <a:spLocks noGrp="1" noRot="1" noChangeAspect="1"/>
+          </p:cNvSpPr>
+          <p:nvPr>
+            <p:ph type="sldImg"/>
+          </p:nvPr>
+        </p:nvSpPr>
+        <p:spPr/>
+      </p:sp>
+      <p:sp>
+        <p:nvSpPr>
+          <p:cNvPr id="3" name="Заметки 2">
+            <a:extLst>
+              <a:ext uri="{FF2B5EF4-FFF2-40B4-BE49-F238E27FC236}">
+                <a16:creationId xmlns:a16="http://schemas.microsoft.com/office/drawing/2014/main" id="{30F24614-45B5-221D-E4C2-02E42D47910F}"/>
+              </a:ext>
+            </a:extLst>
+          </p:cNvPr>
+          <p:cNvSpPr>
+            <a:spLocks noGrp="1"/>
+          </p:cNvSpPr>
+          <p:nvPr>
+            <p:ph type="body" idx="1"/>
+          </p:nvPr>
+        </p:nvSpPr>
+        <p:spPr/>
+        <p:txBody>
+          <a:bodyPr/>
+          <a:lstStyle/>
+          <a:p>
+            <a:endParaRPr lang="ru-GB" dirty="0"/>
+          </a:p>
+        </p:txBody>
+      </p:sp>
+      <p:sp>
+        <p:nvSpPr>
+          <p:cNvPr id="4" name="Номер слайда 3">
+            <a:extLst>
+              <a:ext uri="{FF2B5EF4-FFF2-40B4-BE49-F238E27FC236}">
+                <a16:creationId xmlns:a16="http://schemas.microsoft.com/office/drawing/2014/main" id="{FA0E4E1F-FA76-282C-E413-E263ACABB301}"/>
+              </a:ext>
+            </a:extLst>
+          </p:cNvPr>
+          <p:cNvSpPr>
+            <a:spLocks noGrp="1"/>
+          </p:cNvSpPr>
+          <p:nvPr>
+            <p:ph type="sldNum" sz="quarter" idx="5"/>
+          </p:nvPr>
+        </p:nvSpPr>
+        <p:spPr/>
+        <p:txBody>
+          <a:bodyPr/>
+          <a:lstStyle/>
+          <a:p>
+            <a:fld id="{CC7AE5BE-D43F-D646-9368-4EA0133E6314}" type="slidenum">
+              <a:rPr lang="ru-GB" smtClean="0"/>
+              <a:t>28</a:t>
+            </a:fld>
+            <a:endParaRPr lang="ru-GB"/>
+          </a:p>
+        </p:txBody>
+      </p:sp>
+    </p:spTree>
+    <p:extLst>
+      <p:ext uri="{BB962C8B-B14F-4D97-AF65-F5344CB8AC3E}">
+        <p14:creationId xmlns:p14="http://schemas.microsoft.com/office/powerpoint/2010/main" val="190536816"/>
       </p:ext>
     </p:extLst>
   </p:cSld>
@@ -2880,7 +3425,7 @@
           <a:p>
             <a:fld id="{87680C48-8932-7A4C-BED0-B627A1572044}" type="datetimeFigureOut">
               <a:rPr lang="ru-GB" smtClean="0"/>
-              <a:t>09/03/2026</a:t>
+              <a:t>3/12/26</a:t>
             </a:fld>
             <a:endParaRPr lang="ru-GB"/>
           </a:p>
@@ -3080,7 +3625,7 @@
           <a:p>
             <a:fld id="{87680C48-8932-7A4C-BED0-B627A1572044}" type="datetimeFigureOut">
               <a:rPr lang="ru-GB" smtClean="0"/>
-              <a:t>09/03/2026</a:t>
+              <a:t>3/12/26</a:t>
             </a:fld>
             <a:endParaRPr lang="ru-GB"/>
           </a:p>
@@ -3290,7 +3835,7 @@
           <a:p>
             <a:fld id="{87680C48-8932-7A4C-BED0-B627A1572044}" type="datetimeFigureOut">
               <a:rPr lang="ru-GB" smtClean="0"/>
-              <a:t>09/03/2026</a:t>
+              <a:t>3/12/26</a:t>
             </a:fld>
             <a:endParaRPr lang="ru-GB"/>
           </a:p>
@@ -3490,7 +4035,7 @@
           <a:p>
             <a:fld id="{87680C48-8932-7A4C-BED0-B627A1572044}" type="datetimeFigureOut">
               <a:rPr lang="ru-GB" smtClean="0"/>
-              <a:t>09/03/2026</a:t>
+              <a:t>3/12/26</a:t>
             </a:fld>
             <a:endParaRPr lang="ru-GB"/>
           </a:p>
@@ -3766,7 +4311,7 @@
           <a:p>
             <a:fld id="{87680C48-8932-7A4C-BED0-B627A1572044}" type="datetimeFigureOut">
               <a:rPr lang="ru-GB" smtClean="0"/>
-              <a:t>09/03/2026</a:t>
+              <a:t>3/12/26</a:t>
             </a:fld>
             <a:endParaRPr lang="ru-GB"/>
           </a:p>
@@ -4034,7 +4579,7 @@
           <a:p>
             <a:fld id="{87680C48-8932-7A4C-BED0-B627A1572044}" type="datetimeFigureOut">
               <a:rPr lang="ru-GB" smtClean="0"/>
-              <a:t>09/03/2026</a:t>
+              <a:t>3/12/26</a:t>
             </a:fld>
             <a:endParaRPr lang="ru-GB"/>
           </a:p>
@@ -4449,7 +4994,7 @@
           <a:p>
             <a:fld id="{87680C48-8932-7A4C-BED0-B627A1572044}" type="datetimeFigureOut">
               <a:rPr lang="ru-GB" smtClean="0"/>
-              <a:t>09/03/2026</a:t>
+              <a:t>3/12/26</a:t>
             </a:fld>
             <a:endParaRPr lang="ru-GB"/>
           </a:p>
@@ -4591,7 +5136,7 @@
           <a:p>
             <a:fld id="{87680C48-8932-7A4C-BED0-B627A1572044}" type="datetimeFigureOut">
               <a:rPr lang="ru-GB" smtClean="0"/>
-              <a:t>09/03/2026</a:t>
+              <a:t>3/12/26</a:t>
             </a:fld>
             <a:endParaRPr lang="ru-GB"/>
           </a:p>
@@ -4704,7 +5249,7 @@
           <a:p>
             <a:fld id="{87680C48-8932-7A4C-BED0-B627A1572044}" type="datetimeFigureOut">
               <a:rPr lang="ru-GB" smtClean="0"/>
-              <a:t>09/03/2026</a:t>
+              <a:t>3/12/26</a:t>
             </a:fld>
             <a:endParaRPr lang="ru-GB"/>
           </a:p>
@@ -5017,7 +5562,7 @@
           <a:p>
             <a:fld id="{87680C48-8932-7A4C-BED0-B627A1572044}" type="datetimeFigureOut">
               <a:rPr lang="ru-GB" smtClean="0"/>
-              <a:t>09/03/2026</a:t>
+              <a:t>3/12/26</a:t>
             </a:fld>
             <a:endParaRPr lang="ru-GB"/>
           </a:p>
@@ -5306,7 +5851,7 @@
           <a:p>
             <a:fld id="{87680C48-8932-7A4C-BED0-B627A1572044}" type="datetimeFigureOut">
               <a:rPr lang="ru-GB" smtClean="0"/>
-              <a:t>09/03/2026</a:t>
+              <a:t>3/12/26</a:t>
             </a:fld>
             <a:endParaRPr lang="ru-GB"/>
           </a:p>
@@ -5549,7 +6094,7 @@
           <a:p>
             <a:fld id="{87680C48-8932-7A4C-BED0-B627A1572044}" type="datetimeFigureOut">
               <a:rPr lang="ru-GB" smtClean="0"/>
-              <a:t>09/03/2026</a:t>
+              <a:t>3/12/26</a:t>
             </a:fld>
             <a:endParaRPr lang="ru-GB"/>
           </a:p>
@@ -6879,8 +7424,8 @@
           </a:p>
         </p:txBody>
       </p:sp>
-      <mc:AlternateContent xmlns:mc="http://schemas.openxmlformats.org/markup-compatibility/2006">
-        <mc:Choice xmlns:a14="http://schemas.microsoft.com/office/drawing/2010/main" Requires="a14">
+      <mc:AlternateContent xmlns:mc="http://schemas.openxmlformats.org/markup-compatibility/2006" xmlns:a14="http://schemas.microsoft.com/office/drawing/2010/main">
+        <mc:Choice Requires="a14">
           <p:graphicFrame>
             <p:nvGraphicFramePr>
               <p:cNvPr id="5" name="Таблица 4">
@@ -7611,7 +8156,7 @@
             </a:graphic>
           </p:graphicFrame>
         </mc:Choice>
-        <mc:Fallback>
+        <mc:Fallback xmlns="">
           <p:graphicFrame>
             <p:nvGraphicFramePr>
               <p:cNvPr id="5" name="Таблица 4">
@@ -9960,6 +10505,2657 @@
         <p:cNvPr id="1" name="">
           <a:extLst>
             <a:ext uri="{FF2B5EF4-FFF2-40B4-BE49-F238E27FC236}">
+              <a16:creationId xmlns:a16="http://schemas.microsoft.com/office/drawing/2014/main" id="{FCB88D71-DEFB-D91D-1EC3-B3AFE5E3C1BD}"/>
+            </a:ext>
+          </a:extLst>
+        </p:cNvPr>
+        <p:cNvGrpSpPr/>
+        <p:nvPr/>
+      </p:nvGrpSpPr>
+      <p:grpSpPr>
+        <a:xfrm>
+          <a:off x="0" y="0"/>
+          <a:ext cx="0" cy="0"/>
+          <a:chOff x="0" y="0"/>
+          <a:chExt cx="0" cy="0"/>
+        </a:xfrm>
+      </p:grpSpPr>
+      <p:sp>
+        <p:nvSpPr>
+          <p:cNvPr id="8" name="Заголовок 1">
+            <a:extLst>
+              <a:ext uri="{FF2B5EF4-FFF2-40B4-BE49-F238E27FC236}">
+                <a16:creationId xmlns:a16="http://schemas.microsoft.com/office/drawing/2014/main" id="{4704F892-22B0-EB2F-3B90-3B6336385939}"/>
+              </a:ext>
+            </a:extLst>
+          </p:cNvPr>
+          <p:cNvSpPr txBox="1">
+            <a:spLocks/>
+          </p:cNvSpPr>
+          <p:nvPr/>
+        </p:nvSpPr>
+        <p:spPr>
+          <a:xfrm>
+            <a:off x="990600" y="297606"/>
+            <a:ext cx="10515600" cy="1325563"/>
+          </a:xfrm>
+          <a:prstGeom prst="rect">
+            <a:avLst/>
+          </a:prstGeom>
+        </p:spPr>
+        <p:txBody>
+          <a:bodyPr vert="horz" lIns="91440" tIns="45720" rIns="91440" bIns="45720" rtlCol="0" anchor="ctr">
+            <a:normAutofit/>
+          </a:bodyPr>
+          <a:lstStyle>
+            <a:lvl1pPr algn="l" defTabSz="914400" rtl="0" eaLnBrk="1" latinLnBrk="0" hangingPunct="1">
+              <a:lnSpc>
+                <a:spcPct val="90000"/>
+              </a:lnSpc>
+              <a:spcBef>
+                <a:spcPct val="0"/>
+              </a:spcBef>
+              <a:buNone/>
+              <a:defRPr sz="4400" kern="1200">
+                <a:solidFill>
+                  <a:schemeClr val="tx1"/>
+                </a:solidFill>
+                <a:latin typeface="+mj-lt"/>
+                <a:ea typeface="+mj-ea"/>
+                <a:cs typeface="+mj-cs"/>
+              </a:defRPr>
+            </a:lvl1pPr>
+          </a:lstStyle>
+          <a:p>
+            <a:r>
+              <a:rPr lang="ru-RU" b="1" dirty="0">
+                <a:solidFill>
+                  <a:srgbClr val="000000"/>
+                </a:solidFill>
+                <a:latin typeface="Helvetica" pitchFamily="2" charset="0"/>
+              </a:rPr>
+              <a:t>Метрики </a:t>
+            </a:r>
+            <a:r>
+              <a:rPr lang="ru-RU" b="1" dirty="0" err="1">
+                <a:solidFill>
+                  <a:srgbClr val="000000"/>
+                </a:solidFill>
+                <a:latin typeface="Helvetica" pitchFamily="2" charset="0"/>
+              </a:rPr>
+              <a:t>многоклассовой</a:t>
+            </a:r>
+            <a:r>
+              <a:rPr lang="ru-RU" b="1" dirty="0">
+                <a:solidFill>
+                  <a:srgbClr val="000000"/>
+                </a:solidFill>
+                <a:latin typeface="Helvetica" pitchFamily="2" charset="0"/>
+              </a:rPr>
+              <a:t> классификации</a:t>
+            </a:r>
+          </a:p>
+        </p:txBody>
+      </p:sp>
+      <p:graphicFrame>
+        <p:nvGraphicFramePr>
+          <p:cNvPr id="16" name="Таблица 15">
+            <a:extLst>
+              <a:ext uri="{FF2B5EF4-FFF2-40B4-BE49-F238E27FC236}">
+                <a16:creationId xmlns:a16="http://schemas.microsoft.com/office/drawing/2014/main" id="{46D41C50-4349-4B9D-436B-4A7FB6B6F170}"/>
+              </a:ext>
+            </a:extLst>
+          </p:cNvPr>
+          <p:cNvGraphicFramePr>
+            <a:graphicFrameLocks noGrp="1"/>
+          </p:cNvGraphicFramePr>
+          <p:nvPr>
+            <p:extLst>
+              <p:ext uri="{D42A27DB-BD31-4B8C-83A1-F6EECF244321}">
+                <p14:modId xmlns:p14="http://schemas.microsoft.com/office/powerpoint/2010/main" val="3650059672"/>
+              </p:ext>
+            </p:extLst>
+          </p:nvPr>
+        </p:nvGraphicFramePr>
+        <p:xfrm>
+          <a:off x="115747" y="1707620"/>
+          <a:ext cx="11956646" cy="5053999"/>
+        </p:xfrm>
+        <a:graphic>
+          <a:graphicData uri="http://schemas.openxmlformats.org/drawingml/2006/table">
+            <a:tbl>
+              <a:tblPr firstRow="1" bandRow="1">
+                <a:tableStyleId>{2D5ABB26-0587-4C30-8999-92F81FD0307C}</a:tableStyleId>
+              </a:tblPr>
+              <a:tblGrid>
+                <a:gridCol w="1936640">
+                  <a:extLst>
+                    <a:ext uri="{9D8B030D-6E8A-4147-A177-3AD203B41FA5}">
+                      <a16:colId xmlns:a16="http://schemas.microsoft.com/office/drawing/2014/main" val="3701492871"/>
+                    </a:ext>
+                  </a:extLst>
+                </a:gridCol>
+                <a:gridCol w="3340002">
+                  <a:extLst>
+                    <a:ext uri="{9D8B030D-6E8A-4147-A177-3AD203B41FA5}">
+                      <a16:colId xmlns:a16="http://schemas.microsoft.com/office/drawing/2014/main" val="3331177459"/>
+                    </a:ext>
+                  </a:extLst>
+                </a:gridCol>
+                <a:gridCol w="3340002">
+                  <a:extLst>
+                    <a:ext uri="{9D8B030D-6E8A-4147-A177-3AD203B41FA5}">
+                      <a16:colId xmlns:a16="http://schemas.microsoft.com/office/drawing/2014/main" val="2255886704"/>
+                    </a:ext>
+                  </a:extLst>
+                </a:gridCol>
+                <a:gridCol w="3340002">
+                  <a:extLst>
+                    <a:ext uri="{9D8B030D-6E8A-4147-A177-3AD203B41FA5}">
+                      <a16:colId xmlns:a16="http://schemas.microsoft.com/office/drawing/2014/main" val="1334793108"/>
+                    </a:ext>
+                  </a:extLst>
+                </a:gridCol>
+              </a:tblGrid>
+              <a:tr h="426167">
+                <a:tc>
+                  <a:txBody>
+                    <a:bodyPr/>
+                    <a:lstStyle/>
+                    <a:p>
+                      <a:pPr algn="ctr"/>
+                      <a:endParaRPr lang="ru-RU" dirty="0"/>
+                    </a:p>
+                  </a:txBody>
+                  <a:tcPr anchor="ctr"/>
+                </a:tc>
+                <a:tc>
+                  <a:txBody>
+                    <a:bodyPr/>
+                    <a:lstStyle/>
+                    <a:p>
+                      <a:pPr algn="ctr"/>
+                      <a:r>
+                        <a:rPr lang="en-US" sz="1800" b="1" dirty="0"/>
+                        <a:t>micro-avg</a:t>
+                      </a:r>
+                      <a:endParaRPr lang="ru-RU" dirty="0"/>
+                    </a:p>
+                  </a:txBody>
+                  <a:tcPr anchor="ctr"/>
+                </a:tc>
+                <a:tc>
+                  <a:txBody>
+                    <a:bodyPr/>
+                    <a:lstStyle/>
+                    <a:p>
+                      <a:pPr algn="ctr"/>
+                      <a:r>
+                        <a:rPr lang="en-US" sz="1800" b="1" dirty="0"/>
+                        <a:t>macro-avg</a:t>
+                      </a:r>
+                      <a:endParaRPr lang="ru-RU" dirty="0"/>
+                    </a:p>
+                  </a:txBody>
+                  <a:tcPr anchor="ctr"/>
+                </a:tc>
+                <a:tc>
+                  <a:txBody>
+                    <a:bodyPr/>
+                    <a:lstStyle/>
+                    <a:p>
+                      <a:pPr algn="ctr"/>
+                      <a:r>
+                        <a:rPr lang="en-US" sz="1800" b="1" dirty="0"/>
+                        <a:t>weighted-avg</a:t>
+                      </a:r>
+                      <a:endParaRPr lang="ru-RU" dirty="0"/>
+                    </a:p>
+                  </a:txBody>
+                  <a:tcPr anchor="ctr"/>
+                </a:tc>
+                <a:extLst>
+                  <a:ext uri="{0D108BD9-81ED-4DB2-BD59-A6C34878D82A}">
+                    <a16:rowId xmlns:a16="http://schemas.microsoft.com/office/drawing/2014/main" val="2102661795"/>
+                  </a:ext>
+                </a:extLst>
+              </a:tr>
+              <a:tr h="1403162">
+                <a:tc>
+                  <a:txBody>
+                    <a:bodyPr/>
+                    <a:lstStyle/>
+                    <a:p>
+                      <a:pPr algn="ctr"/>
+                      <a:r>
+                        <a:rPr lang="ru-RU" b="1" dirty="0"/>
+                        <a:t>Описание</a:t>
+                      </a:r>
+                    </a:p>
+                  </a:txBody>
+                  <a:tcPr anchor="ctr"/>
+                </a:tc>
+                <a:tc>
+                  <a:txBody>
+                    <a:bodyPr/>
+                    <a:lstStyle/>
+                    <a:p>
+                      <a:pPr algn="ctr"/>
+                      <a:r>
+                        <a:rPr lang="ru-RU" sz="1800" dirty="0"/>
+                        <a:t>Суммируем все «ошибки» и «попадания» в кучу, </a:t>
+                      </a:r>
+                      <a:r>
+                        <a:rPr lang="ru-RU" dirty="0"/>
+                        <a:t>считаем общий результат</a:t>
+                      </a:r>
+                      <a:r>
+                        <a:rPr lang="ru-RU" sz="1800" dirty="0"/>
+                        <a:t> </a:t>
+                      </a:r>
+                      <a:endParaRPr lang="ru-RU" dirty="0"/>
+                    </a:p>
+                  </a:txBody>
+                  <a:tcPr anchor="ctr"/>
+                </a:tc>
+                <a:tc>
+                  <a:txBody>
+                    <a:bodyPr/>
+                    <a:lstStyle/>
+                    <a:p>
+                      <a:pPr marL="0" marR="0" lvl="0" indent="0" algn="ctr" defTabSz="914400" rtl="0" eaLnBrk="1" fontAlgn="auto" latinLnBrk="0" hangingPunct="1">
+                        <a:lnSpc>
+                          <a:spcPct val="100000"/>
+                        </a:lnSpc>
+                        <a:spcBef>
+                          <a:spcPts val="0"/>
+                        </a:spcBef>
+                        <a:spcAft>
+                          <a:spcPts val="0"/>
+                        </a:spcAft>
+                        <a:buClrTx/>
+                        <a:buSzTx/>
+                        <a:buFontTx/>
+                        <a:buNone/>
+                        <a:tabLst/>
+                        <a:defRPr/>
+                      </a:pPr>
+                      <a:r>
+                        <a:rPr lang="ru-RU" dirty="0"/>
+                        <a:t>Считаем качество по каждому классу отдельно, потом берем среднее (все классы равны)</a:t>
+                      </a:r>
+                      <a:endParaRPr lang="en-US" sz="1800" dirty="0"/>
+                    </a:p>
+                    <a:p>
+                      <a:pPr algn="ctr"/>
+                      <a:endParaRPr lang="ru-RU" dirty="0"/>
+                    </a:p>
+                  </a:txBody>
+                  <a:tcPr anchor="ctr"/>
+                </a:tc>
+                <a:tc>
+                  <a:txBody>
+                    <a:bodyPr/>
+                    <a:lstStyle/>
+                    <a:p>
+                      <a:pPr algn="ctr"/>
+                      <a:r>
+                        <a:rPr lang="ru-RU" dirty="0"/>
+                        <a:t>Считаем качество по каждому классу, но умножаем на «важность» (размер) класса</a:t>
+                      </a:r>
+                    </a:p>
+                  </a:txBody>
+                  <a:tcPr anchor="ctr"/>
+                </a:tc>
+                <a:extLst>
+                  <a:ext uri="{0D108BD9-81ED-4DB2-BD59-A6C34878D82A}">
+                    <a16:rowId xmlns:a16="http://schemas.microsoft.com/office/drawing/2014/main" val="3787964377"/>
+                  </a:ext>
+                </a:extLst>
+              </a:tr>
+              <a:tr h="1403162">
+                <a:tc>
+                  <a:txBody>
+                    <a:bodyPr/>
+                    <a:lstStyle/>
+                    <a:p>
+                      <a:pPr algn="ctr"/>
+                      <a:r>
+                        <a:rPr lang="ru-RU" b="1" dirty="0"/>
+                        <a:t>Работа с дисбалансом классов</a:t>
+                      </a:r>
+                    </a:p>
+                  </a:txBody>
+                  <a:tcPr anchor="ctr"/>
+                </a:tc>
+                <a:tc>
+                  <a:txBody>
+                    <a:bodyPr/>
+                    <a:lstStyle/>
+                    <a:p>
+                      <a:pPr algn="ctr"/>
+                      <a:r>
+                        <a:rPr lang="ru-RU" dirty="0"/>
+                        <a:t>Не учитывает дисбаланс, без разницы какое качество предсказаний для более редкого класса, важна картина в общем</a:t>
+                      </a:r>
+                    </a:p>
+                  </a:txBody>
+                  <a:tcPr anchor="ctr"/>
+                </a:tc>
+                <a:tc>
+                  <a:txBody>
+                    <a:bodyPr/>
+                    <a:lstStyle/>
+                    <a:p>
+                      <a:pPr algn="ctr"/>
+                      <a:r>
+                        <a:rPr lang="ru-RU" dirty="0"/>
+                        <a:t>Все классы равноценны, качество предсказаний для более редкого класса важно также как и качество для более частого класса </a:t>
+                      </a:r>
+                    </a:p>
+                  </a:txBody>
+                  <a:tcPr anchor="ctr"/>
+                </a:tc>
+                <a:tc>
+                  <a:txBody>
+                    <a:bodyPr/>
+                    <a:lstStyle/>
+                    <a:p>
+                      <a:pPr algn="ctr"/>
+                      <a:r>
+                        <a:rPr lang="ru-RU" sz="1800" b="0" i="0" u="none" strike="noStrike" kern="1200" dirty="0">
+                          <a:solidFill>
+                            <a:schemeClr val="tx1"/>
+                          </a:solidFill>
+                          <a:effectLst/>
+                          <a:latin typeface="+mn-lt"/>
+                          <a:ea typeface="+mn-ea"/>
+                          <a:cs typeface="+mn-cs"/>
+                        </a:rPr>
+                        <a:t>Учитывает вклад каждого класса, но пропорционально его размеру в данных</a:t>
+                      </a:r>
+                      <a:endParaRPr lang="ru-RU" dirty="0"/>
+                    </a:p>
+                  </a:txBody>
+                  <a:tcPr anchor="ctr"/>
+                </a:tc>
+                <a:extLst>
+                  <a:ext uri="{0D108BD9-81ED-4DB2-BD59-A6C34878D82A}">
+                    <a16:rowId xmlns:a16="http://schemas.microsoft.com/office/drawing/2014/main" val="4163896028"/>
+                  </a:ext>
+                </a:extLst>
+              </a:tr>
+              <a:tr h="1761630">
+                <a:tc>
+                  <a:txBody>
+                    <a:bodyPr/>
+                    <a:lstStyle/>
+                    <a:p>
+                      <a:pPr algn="ctr"/>
+                      <a:r>
+                        <a:rPr lang="ru-RU" sz="1800" b="1" i="0" u="none" strike="noStrike" kern="1200" dirty="0">
+                          <a:solidFill>
+                            <a:schemeClr val="tx1"/>
+                          </a:solidFill>
+                          <a:effectLst/>
+                          <a:latin typeface="+mn-lt"/>
+                          <a:ea typeface="+mn-ea"/>
+                          <a:cs typeface="+mn-cs"/>
+                        </a:rPr>
+                        <a:t>Когда выбрать</a:t>
+                      </a:r>
+                      <a:endParaRPr lang="ru-RU" b="1" dirty="0"/>
+                    </a:p>
+                  </a:txBody>
+                  <a:tcPr anchor="ctr"/>
+                </a:tc>
+                <a:tc>
+                  <a:txBody>
+                    <a:bodyPr/>
+                    <a:lstStyle/>
+                    <a:p>
+                      <a:pPr algn="ctr"/>
+                      <a:r>
+                        <a:rPr lang="ru-RU" sz="1800" b="0" i="0" u="none" strike="noStrike" kern="1200" dirty="0">
+                          <a:solidFill>
+                            <a:schemeClr val="tx1"/>
+                          </a:solidFill>
+                          <a:effectLst/>
+                          <a:latin typeface="+mn-lt"/>
+                          <a:ea typeface="+mn-ea"/>
+                          <a:cs typeface="+mn-cs"/>
+                        </a:rPr>
+                        <a:t>Важно общее качество на всех объектах. </a:t>
+                      </a:r>
+                    </a:p>
+                    <a:p>
+                      <a:pPr algn="ctr"/>
+                      <a:r>
+                        <a:rPr lang="ru-RU" sz="1800" b="1" i="0" u="none" strike="noStrike" kern="1200" dirty="0">
+                          <a:solidFill>
+                            <a:schemeClr val="tx1"/>
+                          </a:solidFill>
+                          <a:effectLst/>
+                          <a:latin typeface="+mn-lt"/>
+                          <a:ea typeface="+mn-ea"/>
+                          <a:cs typeface="+mn-cs"/>
+                        </a:rPr>
+                        <a:t>Датасет сбалансирован</a:t>
+                      </a:r>
+                      <a:r>
+                        <a:rPr lang="ru-RU" sz="1800" b="0" i="0" u="none" strike="noStrike" kern="1200" dirty="0">
+                          <a:solidFill>
+                            <a:schemeClr val="tx1"/>
+                          </a:solidFill>
+                          <a:effectLst/>
+                          <a:latin typeface="+mn-lt"/>
+                          <a:ea typeface="+mn-ea"/>
+                          <a:cs typeface="+mn-cs"/>
+                        </a:rPr>
+                        <a:t>.</a:t>
+                      </a:r>
+                      <a:endParaRPr lang="ru-RU" dirty="0"/>
+                    </a:p>
+                  </a:txBody>
+                  <a:tcPr anchor="ctr"/>
+                </a:tc>
+                <a:tc>
+                  <a:txBody>
+                    <a:bodyPr/>
+                    <a:lstStyle/>
+                    <a:p>
+                      <a:pPr algn="ctr"/>
+                      <a:r>
+                        <a:rPr lang="ru-RU" sz="1800" b="0" i="0" u="none" strike="noStrike" kern="1200" dirty="0">
+                          <a:solidFill>
+                            <a:schemeClr val="tx1"/>
+                          </a:solidFill>
+                          <a:effectLst/>
+                          <a:latin typeface="+mn-lt"/>
+                          <a:ea typeface="+mn-ea"/>
+                          <a:cs typeface="+mn-cs"/>
+                        </a:rPr>
+                        <a:t>Важно качество для каждого класса. </a:t>
+                      </a:r>
+                    </a:p>
+                    <a:p>
+                      <a:pPr algn="ctr"/>
+                      <a:r>
+                        <a:rPr lang="ru-RU" sz="1800" b="1" i="0" u="none" strike="noStrike" kern="1200" dirty="0">
+                          <a:solidFill>
+                            <a:schemeClr val="tx1"/>
+                          </a:solidFill>
+                          <a:effectLst/>
+                          <a:latin typeface="+mn-lt"/>
+                          <a:ea typeface="+mn-ea"/>
+                          <a:cs typeface="+mn-cs"/>
+                        </a:rPr>
+                        <a:t>Есть дисбаланс</a:t>
+                      </a:r>
+                      <a:r>
+                        <a:rPr lang="ru-RU" sz="1800" b="0" i="0" u="none" strike="noStrike" kern="1200" dirty="0">
+                          <a:solidFill>
+                            <a:schemeClr val="tx1"/>
+                          </a:solidFill>
+                          <a:effectLst/>
+                          <a:latin typeface="+mn-lt"/>
+                          <a:ea typeface="+mn-ea"/>
+                          <a:cs typeface="+mn-cs"/>
+                        </a:rPr>
+                        <a:t>, где малый класс критичен.</a:t>
+                      </a:r>
+                      <a:endParaRPr lang="ru-RU" dirty="0"/>
+                    </a:p>
+                  </a:txBody>
+                  <a:tcPr anchor="ctr"/>
+                </a:tc>
+                <a:tc>
+                  <a:txBody>
+                    <a:bodyPr/>
+                    <a:lstStyle/>
+                    <a:p>
+                      <a:pPr algn="ctr"/>
+                      <a:r>
+                        <a:rPr lang="ru-RU" b="1" dirty="0"/>
+                        <a:t>Что-то среднее</a:t>
+                      </a:r>
+                      <a:r>
+                        <a:rPr lang="ru-RU" dirty="0"/>
+                        <a:t>, </a:t>
+                      </a:r>
+                      <a:r>
+                        <a:rPr lang="ru-RU" sz="1800" b="0" i="0" u="none" strike="noStrike" kern="1200" dirty="0">
+                          <a:solidFill>
+                            <a:schemeClr val="tx1"/>
+                          </a:solidFill>
+                          <a:effectLst/>
+                          <a:latin typeface="+mn-lt"/>
+                          <a:ea typeface="+mn-ea"/>
+                          <a:cs typeface="+mn-cs"/>
+                        </a:rPr>
+                        <a:t>дает более реалистичную картину, чем микро (не завышает значение больших классов), но и не завышает значение малых классов, как макро.</a:t>
+                      </a:r>
+                      <a:endParaRPr lang="ru-RU" dirty="0"/>
+                    </a:p>
+                  </a:txBody>
+                  <a:tcPr anchor="ctr"/>
+                </a:tc>
+                <a:extLst>
+                  <a:ext uri="{0D108BD9-81ED-4DB2-BD59-A6C34878D82A}">
+                    <a16:rowId xmlns:a16="http://schemas.microsoft.com/office/drawing/2014/main" val="894077401"/>
+                  </a:ext>
+                </a:extLst>
+              </a:tr>
+            </a:tbl>
+          </a:graphicData>
+        </a:graphic>
+      </p:graphicFrame>
+    </p:spTree>
+    <p:extLst>
+      <p:ext uri="{BB962C8B-B14F-4D97-AF65-F5344CB8AC3E}">
+        <p14:creationId xmlns:p14="http://schemas.microsoft.com/office/powerpoint/2010/main" val="25299040"/>
+      </p:ext>
+    </p:extLst>
+  </p:cSld>
+  <p:clrMapOvr>
+    <a:masterClrMapping/>
+  </p:clrMapOvr>
+</p:sld>
+</file>
+
+<file path=ppt/slides/slide21.xml><?xml version="1.0" encoding="utf-8"?>
+<p:sld xmlns:a="http://schemas.openxmlformats.org/drawingml/2006/main" xmlns:r="http://schemas.openxmlformats.org/officeDocument/2006/relationships" xmlns:p="http://schemas.openxmlformats.org/presentationml/2006/main">
+  <p:cSld>
+    <p:spTree>
+      <p:nvGrpSpPr>
+        <p:cNvPr id="1" name="">
+          <a:extLst>
+            <a:ext uri="{FF2B5EF4-FFF2-40B4-BE49-F238E27FC236}">
+              <a16:creationId xmlns:a16="http://schemas.microsoft.com/office/drawing/2014/main" id="{C025D7D2-A9D1-74DF-9D7A-C7D7F9EAD1C8}"/>
+            </a:ext>
+          </a:extLst>
+        </p:cNvPr>
+        <p:cNvGrpSpPr/>
+        <p:nvPr/>
+      </p:nvGrpSpPr>
+      <p:grpSpPr>
+        <a:xfrm>
+          <a:off x="0" y="0"/>
+          <a:ext cx="0" cy="0"/>
+          <a:chOff x="0" y="0"/>
+          <a:chExt cx="0" cy="0"/>
+        </a:xfrm>
+      </p:grpSpPr>
+      <p:sp>
+        <p:nvSpPr>
+          <p:cNvPr id="8" name="Заголовок 1">
+            <a:extLst>
+              <a:ext uri="{FF2B5EF4-FFF2-40B4-BE49-F238E27FC236}">
+                <a16:creationId xmlns:a16="http://schemas.microsoft.com/office/drawing/2014/main" id="{7A95828D-C084-5C96-61E1-03E51356B545}"/>
+              </a:ext>
+            </a:extLst>
+          </p:cNvPr>
+          <p:cNvSpPr txBox="1">
+            <a:spLocks/>
+          </p:cNvSpPr>
+          <p:nvPr/>
+        </p:nvSpPr>
+        <p:spPr>
+          <a:xfrm>
+            <a:off x="990600" y="297606"/>
+            <a:ext cx="10515600" cy="1325563"/>
+          </a:xfrm>
+          <a:prstGeom prst="rect">
+            <a:avLst/>
+          </a:prstGeom>
+        </p:spPr>
+        <p:txBody>
+          <a:bodyPr vert="horz" lIns="91440" tIns="45720" rIns="91440" bIns="45720" rtlCol="0" anchor="ctr">
+            <a:normAutofit/>
+          </a:bodyPr>
+          <a:lstStyle>
+            <a:lvl1pPr algn="l" defTabSz="914400" rtl="0" eaLnBrk="1" latinLnBrk="0" hangingPunct="1">
+              <a:lnSpc>
+                <a:spcPct val="90000"/>
+              </a:lnSpc>
+              <a:spcBef>
+                <a:spcPct val="0"/>
+              </a:spcBef>
+              <a:buNone/>
+              <a:defRPr sz="4400" kern="1200">
+                <a:solidFill>
+                  <a:schemeClr val="tx1"/>
+                </a:solidFill>
+                <a:latin typeface="+mj-lt"/>
+                <a:ea typeface="+mj-ea"/>
+                <a:cs typeface="+mj-cs"/>
+              </a:defRPr>
+            </a:lvl1pPr>
+          </a:lstStyle>
+          <a:p>
+            <a:r>
+              <a:rPr lang="ru-RU" b="1" dirty="0">
+                <a:solidFill>
+                  <a:srgbClr val="000000"/>
+                </a:solidFill>
+                <a:latin typeface="Helvetica" pitchFamily="2" charset="0"/>
+              </a:rPr>
+              <a:t>Метрики </a:t>
+            </a:r>
+            <a:r>
+              <a:rPr lang="ru-RU" b="1" dirty="0" err="1">
+                <a:solidFill>
+                  <a:srgbClr val="000000"/>
+                </a:solidFill>
+                <a:latin typeface="Helvetica" pitchFamily="2" charset="0"/>
+              </a:rPr>
+              <a:t>многоклассовой</a:t>
+            </a:r>
+            <a:r>
+              <a:rPr lang="ru-RU" b="1" dirty="0">
+                <a:solidFill>
+                  <a:srgbClr val="000000"/>
+                </a:solidFill>
+                <a:latin typeface="Helvetica" pitchFamily="2" charset="0"/>
+              </a:rPr>
+              <a:t> классификации</a:t>
+            </a:r>
+          </a:p>
+        </p:txBody>
+      </p:sp>
+      <p:graphicFrame>
+        <p:nvGraphicFramePr>
+          <p:cNvPr id="16" name="Таблица 15">
+            <a:extLst>
+              <a:ext uri="{FF2B5EF4-FFF2-40B4-BE49-F238E27FC236}">
+                <a16:creationId xmlns:a16="http://schemas.microsoft.com/office/drawing/2014/main" id="{A960ACA5-93DE-ACE0-82B7-CCAC69BDBADF}"/>
+              </a:ext>
+            </a:extLst>
+          </p:cNvPr>
+          <p:cNvGraphicFramePr>
+            <a:graphicFrameLocks noGrp="1"/>
+          </p:cNvGraphicFramePr>
+          <p:nvPr>
+            <p:extLst>
+              <p:ext uri="{D42A27DB-BD31-4B8C-83A1-F6EECF244321}">
+                <p14:modId xmlns:p14="http://schemas.microsoft.com/office/powerpoint/2010/main" val="3685384132"/>
+              </p:ext>
+            </p:extLst>
+          </p:nvPr>
+        </p:nvGraphicFramePr>
+        <p:xfrm>
+          <a:off x="117677" y="4740187"/>
+          <a:ext cx="11956646" cy="1073989"/>
+        </p:xfrm>
+        <a:graphic>
+          <a:graphicData uri="http://schemas.openxmlformats.org/drawingml/2006/table">
+            <a:tbl>
+              <a:tblPr firstRow="1" bandRow="1">
+                <a:tableStyleId>{2D5ABB26-0587-4C30-8999-92F81FD0307C}</a:tableStyleId>
+              </a:tblPr>
+              <a:tblGrid>
+                <a:gridCol w="1936640">
+                  <a:extLst>
+                    <a:ext uri="{9D8B030D-6E8A-4147-A177-3AD203B41FA5}">
+                      <a16:colId xmlns:a16="http://schemas.microsoft.com/office/drawing/2014/main" val="3701492871"/>
+                    </a:ext>
+                  </a:extLst>
+                </a:gridCol>
+                <a:gridCol w="3340002">
+                  <a:extLst>
+                    <a:ext uri="{9D8B030D-6E8A-4147-A177-3AD203B41FA5}">
+                      <a16:colId xmlns:a16="http://schemas.microsoft.com/office/drawing/2014/main" val="3331177459"/>
+                    </a:ext>
+                  </a:extLst>
+                </a:gridCol>
+                <a:gridCol w="3340002">
+                  <a:extLst>
+                    <a:ext uri="{9D8B030D-6E8A-4147-A177-3AD203B41FA5}">
+                      <a16:colId xmlns:a16="http://schemas.microsoft.com/office/drawing/2014/main" val="2255886704"/>
+                    </a:ext>
+                  </a:extLst>
+                </a:gridCol>
+                <a:gridCol w="3340002">
+                  <a:extLst>
+                    <a:ext uri="{9D8B030D-6E8A-4147-A177-3AD203B41FA5}">
+                      <a16:colId xmlns:a16="http://schemas.microsoft.com/office/drawing/2014/main" val="1334793108"/>
+                    </a:ext>
+                  </a:extLst>
+                </a:gridCol>
+              </a:tblGrid>
+              <a:tr h="215102">
+                <a:tc>
+                  <a:txBody>
+                    <a:bodyPr/>
+                    <a:lstStyle/>
+                    <a:p>
+                      <a:pPr algn="ctr"/>
+                      <a:endParaRPr lang="ru-RU" dirty="0"/>
+                    </a:p>
+                  </a:txBody>
+                  <a:tcPr anchor="ctr"/>
+                </a:tc>
+                <a:tc>
+                  <a:txBody>
+                    <a:bodyPr/>
+                    <a:lstStyle/>
+                    <a:p>
+                      <a:pPr algn="ctr"/>
+                      <a:r>
+                        <a:rPr lang="en-US" sz="1800" b="1" dirty="0"/>
+                        <a:t>micro-avg</a:t>
+                      </a:r>
+                      <a:endParaRPr lang="ru-RU" dirty="0"/>
+                    </a:p>
+                  </a:txBody>
+                  <a:tcPr anchor="ctr"/>
+                </a:tc>
+                <a:tc>
+                  <a:txBody>
+                    <a:bodyPr/>
+                    <a:lstStyle/>
+                    <a:p>
+                      <a:pPr algn="ctr"/>
+                      <a:r>
+                        <a:rPr lang="en-US" sz="1800" b="1" dirty="0"/>
+                        <a:t>macro-avg</a:t>
+                      </a:r>
+                      <a:endParaRPr lang="ru-RU" dirty="0"/>
+                    </a:p>
+                  </a:txBody>
+                  <a:tcPr anchor="ctr"/>
+                </a:tc>
+                <a:tc>
+                  <a:txBody>
+                    <a:bodyPr/>
+                    <a:lstStyle/>
+                    <a:p>
+                      <a:pPr algn="ctr"/>
+                      <a:r>
+                        <a:rPr lang="en-US" sz="1800" b="1" dirty="0"/>
+                        <a:t>weighted-avg</a:t>
+                      </a:r>
+                      <a:endParaRPr lang="ru-RU" dirty="0"/>
+                    </a:p>
+                  </a:txBody>
+                  <a:tcPr anchor="ctr"/>
+                </a:tc>
+                <a:extLst>
+                  <a:ext uri="{0D108BD9-81ED-4DB2-BD59-A6C34878D82A}">
+                    <a16:rowId xmlns:a16="http://schemas.microsoft.com/office/drawing/2014/main" val="2102661795"/>
+                  </a:ext>
+                </a:extLst>
+              </a:tr>
+              <a:tr h="708229">
+                <a:tc>
+                  <a:txBody>
+                    <a:bodyPr/>
+                    <a:lstStyle/>
+                    <a:p>
+                      <a:pPr algn="ctr"/>
+                      <a:r>
+                        <a:rPr lang="en-US" b="1" dirty="0"/>
+                        <a:t>f1</a:t>
+                      </a:r>
+                      <a:endParaRPr lang="ru-RU" b="1" dirty="0"/>
+                    </a:p>
+                  </a:txBody>
+                  <a:tcPr anchor="ctr"/>
+                </a:tc>
+                <a:tc>
+                  <a:txBody>
+                    <a:bodyPr/>
+                    <a:lstStyle/>
+                    <a:p>
+                      <a:pPr algn="ctr"/>
+                      <a:r>
+                        <a:rPr lang="ru-RU" sz="1800" b="0" i="0" u="none" strike="noStrike" kern="1200" dirty="0">
+                          <a:solidFill>
+                            <a:schemeClr val="tx1"/>
+                          </a:solidFill>
+                          <a:effectLst/>
+                          <a:latin typeface="+mn-lt"/>
+                          <a:ea typeface="+mn-ea"/>
+                          <a:cs typeface="+mn-cs"/>
+                        </a:rPr>
+                        <a:t>0.955</a:t>
+                      </a:r>
+                      <a:endParaRPr lang="ru-RU" b="0" dirty="0"/>
+                    </a:p>
+                  </a:txBody>
+                  <a:tcPr anchor="ctr"/>
+                </a:tc>
+                <a:tc>
+                  <a:txBody>
+                    <a:bodyPr/>
+                    <a:lstStyle/>
+                    <a:p>
+                      <a:pPr algn="ctr"/>
+                      <a:r>
+                        <a:rPr lang="ru-RU" sz="1800" b="0" i="0" u="none" strike="noStrike" kern="1200" dirty="0">
+                          <a:solidFill>
+                            <a:schemeClr val="tx1"/>
+                          </a:solidFill>
+                          <a:effectLst/>
+                          <a:latin typeface="+mn-lt"/>
+                          <a:ea typeface="+mn-ea"/>
+                          <a:cs typeface="+mn-cs"/>
+                        </a:rPr>
+                        <a:t>0.76</a:t>
+                      </a:r>
+                      <a:endParaRPr lang="ru-RU" dirty="0"/>
+                    </a:p>
+                  </a:txBody>
+                  <a:tcPr anchor="ctr"/>
+                </a:tc>
+                <a:tc>
+                  <a:txBody>
+                    <a:bodyPr/>
+                    <a:lstStyle/>
+                    <a:p>
+                      <a:pPr algn="ctr"/>
+                      <a:r>
+                        <a:rPr lang="ru-RU" sz="1800" b="0" i="0" u="none" strike="noStrike" kern="1200" dirty="0">
+                          <a:solidFill>
+                            <a:schemeClr val="tx1"/>
+                          </a:solidFill>
+                          <a:effectLst/>
+                          <a:latin typeface="+mn-lt"/>
+                          <a:ea typeface="+mn-ea"/>
+                          <a:cs typeface="+mn-cs"/>
+                        </a:rPr>
+                        <a:t>0.954</a:t>
+                      </a:r>
+                      <a:endParaRPr lang="ru-RU" b="0" dirty="0"/>
+                    </a:p>
+                  </a:txBody>
+                  <a:tcPr anchor="ctr"/>
+                </a:tc>
+                <a:extLst>
+                  <a:ext uri="{0D108BD9-81ED-4DB2-BD59-A6C34878D82A}">
+                    <a16:rowId xmlns:a16="http://schemas.microsoft.com/office/drawing/2014/main" val="3787964377"/>
+                  </a:ext>
+                </a:extLst>
+              </a:tr>
+            </a:tbl>
+          </a:graphicData>
+        </a:graphic>
+      </p:graphicFrame>
+      <p:sp>
+        <p:nvSpPr>
+          <p:cNvPr id="2" name="TextBox 1">
+            <a:extLst>
+              <a:ext uri="{FF2B5EF4-FFF2-40B4-BE49-F238E27FC236}">
+                <a16:creationId xmlns:a16="http://schemas.microsoft.com/office/drawing/2014/main" id="{242144FA-0DE7-58D3-6F70-96E167F393B9}"/>
+              </a:ext>
+            </a:extLst>
+          </p:cNvPr>
+          <p:cNvSpPr txBox="1"/>
+          <p:nvPr/>
+        </p:nvSpPr>
+        <p:spPr>
+          <a:xfrm>
+            <a:off x="990600" y="1933147"/>
+            <a:ext cx="7463903" cy="923330"/>
+          </a:xfrm>
+          <a:prstGeom prst="rect">
+            <a:avLst/>
+          </a:prstGeom>
+          <a:noFill/>
+        </p:spPr>
+        <p:txBody>
+          <a:bodyPr wrap="none" rtlCol="0">
+            <a:spAutoFit/>
+          </a:bodyPr>
+          <a:lstStyle/>
+          <a:p>
+            <a:r>
+              <a:rPr lang="ru-RU" b="1" dirty="0"/>
+              <a:t>Пример:</a:t>
+            </a:r>
+            <a:r>
+              <a:rPr lang="ru-RU" dirty="0"/>
+              <a:t> решаем задачу </a:t>
+            </a:r>
+            <a:r>
+              <a:rPr lang="ru-RU" b="1" dirty="0"/>
+              <a:t>классификации животных</a:t>
+            </a:r>
+            <a:r>
+              <a:rPr lang="ru-RU" dirty="0"/>
+              <a:t> по фотографиям</a:t>
+            </a:r>
+          </a:p>
+          <a:p>
+            <a:endParaRPr lang="ru-RU" dirty="0"/>
+          </a:p>
+          <a:p>
+            <a:r>
+              <a:rPr lang="ru-RU" dirty="0"/>
+              <a:t>Модель А</a:t>
+            </a:r>
+          </a:p>
+        </p:txBody>
+      </p:sp>
+      <p:graphicFrame>
+        <p:nvGraphicFramePr>
+          <p:cNvPr id="3" name="Таблица 2">
+            <a:extLst>
+              <a:ext uri="{FF2B5EF4-FFF2-40B4-BE49-F238E27FC236}">
+                <a16:creationId xmlns:a16="http://schemas.microsoft.com/office/drawing/2014/main" id="{6DE6895C-6F0B-3912-B9A2-DC64713B01F0}"/>
+              </a:ext>
+            </a:extLst>
+          </p:cNvPr>
+          <p:cNvGraphicFramePr>
+            <a:graphicFrameLocks noGrp="1"/>
+          </p:cNvGraphicFramePr>
+          <p:nvPr>
+            <p:extLst>
+              <p:ext uri="{D42A27DB-BD31-4B8C-83A1-F6EECF244321}">
+                <p14:modId xmlns:p14="http://schemas.microsoft.com/office/powerpoint/2010/main" val="3605882811"/>
+              </p:ext>
+            </p:extLst>
+          </p:nvPr>
+        </p:nvGraphicFramePr>
+        <p:xfrm>
+          <a:off x="990600" y="2394812"/>
+          <a:ext cx="6516547" cy="1866985"/>
+        </p:xfrm>
+        <a:graphic>
+          <a:graphicData uri="http://schemas.openxmlformats.org/drawingml/2006/table">
+            <a:tbl>
+              <a:tblPr firstRow="1" bandRow="1">
+                <a:tableStyleId>{2D5ABB26-0587-4C30-8999-92F81FD0307C}</a:tableStyleId>
+              </a:tblPr>
+              <a:tblGrid>
+                <a:gridCol w="473274">
+                  <a:extLst>
+                    <a:ext uri="{9D8B030D-6E8A-4147-A177-3AD203B41FA5}">
+                      <a16:colId xmlns:a16="http://schemas.microsoft.com/office/drawing/2014/main" val="3132335557"/>
+                    </a:ext>
+                  </a:extLst>
+                </a:gridCol>
+                <a:gridCol w="1589203">
+                  <a:extLst>
+                    <a:ext uri="{9D8B030D-6E8A-4147-A177-3AD203B41FA5}">
+                      <a16:colId xmlns:a16="http://schemas.microsoft.com/office/drawing/2014/main" val="2334201043"/>
+                    </a:ext>
+                  </a:extLst>
+                </a:gridCol>
+                <a:gridCol w="1484690">
+                  <a:extLst>
+                    <a:ext uri="{9D8B030D-6E8A-4147-A177-3AD203B41FA5}">
+                      <a16:colId xmlns:a16="http://schemas.microsoft.com/office/drawing/2014/main" val="525456860"/>
+                    </a:ext>
+                  </a:extLst>
+                </a:gridCol>
+                <a:gridCol w="1484690">
+                  <a:extLst>
+                    <a:ext uri="{9D8B030D-6E8A-4147-A177-3AD203B41FA5}">
+                      <a16:colId xmlns:a16="http://schemas.microsoft.com/office/drawing/2014/main" val="1832214923"/>
+                    </a:ext>
+                  </a:extLst>
+                </a:gridCol>
+                <a:gridCol w="1484690">
+                  <a:extLst>
+                    <a:ext uri="{9D8B030D-6E8A-4147-A177-3AD203B41FA5}">
+                      <a16:colId xmlns:a16="http://schemas.microsoft.com/office/drawing/2014/main" val="3330695647"/>
+                    </a:ext>
+                  </a:extLst>
+                </a:gridCol>
+              </a:tblGrid>
+              <a:tr h="373397">
+                <a:tc rowSpan="2" gridSpan="2">
+                  <a:txBody>
+                    <a:bodyPr/>
+                    <a:lstStyle/>
+                    <a:p>
+                      <a:pPr algn="ctr"/>
+                      <a:endParaRPr lang="ru-RU" dirty="0"/>
+                    </a:p>
+                  </a:txBody>
+                  <a:tcPr/>
+                </a:tc>
+                <a:tc rowSpan="2" hMerge="1">
+                  <a:txBody>
+                    <a:bodyPr/>
+                    <a:lstStyle/>
+                    <a:p>
+                      <a:endParaRPr lang="ru-RU" dirty="0"/>
+                    </a:p>
+                  </a:txBody>
+                  <a:tcPr/>
+                </a:tc>
+                <a:tc gridSpan="3">
+                  <a:txBody>
+                    <a:bodyPr/>
+                    <a:lstStyle/>
+                    <a:p>
+                      <a:pPr algn="ctr"/>
+                      <a:r>
+                        <a:rPr lang="en-US" dirty="0"/>
+                        <a:t>True/Actual</a:t>
+                      </a:r>
+                      <a:endParaRPr lang="ru-RU" dirty="0"/>
+                    </a:p>
+                  </a:txBody>
+                  <a:tcPr>
+                    <a:solidFill>
+                      <a:schemeClr val="accent2">
+                        <a:lumMod val="40000"/>
+                        <a:lumOff val="60000"/>
+                      </a:schemeClr>
+                    </a:solidFill>
+                  </a:tcPr>
+                </a:tc>
+                <a:tc hMerge="1">
+                  <a:txBody>
+                    <a:bodyPr/>
+                    <a:lstStyle/>
+                    <a:p>
+                      <a:endParaRPr lang="ru-RU" dirty="0"/>
+                    </a:p>
+                  </a:txBody>
+                  <a:tcPr/>
+                </a:tc>
+                <a:tc hMerge="1">
+                  <a:txBody>
+                    <a:bodyPr/>
+                    <a:lstStyle/>
+                    <a:p>
+                      <a:endParaRPr lang="ru-RU" dirty="0"/>
+                    </a:p>
+                  </a:txBody>
+                  <a:tcPr/>
+                </a:tc>
+                <a:extLst>
+                  <a:ext uri="{0D108BD9-81ED-4DB2-BD59-A6C34878D82A}">
+                    <a16:rowId xmlns:a16="http://schemas.microsoft.com/office/drawing/2014/main" val="3228017801"/>
+                  </a:ext>
+                </a:extLst>
+              </a:tr>
+              <a:tr h="373397">
+                <a:tc gridSpan="2" vMerge="1">
+                  <a:txBody>
+                    <a:bodyPr/>
+                    <a:lstStyle/>
+                    <a:p>
+                      <a:endParaRPr lang="ru-RU" dirty="0"/>
+                    </a:p>
+                  </a:txBody>
+                  <a:tcPr/>
+                </a:tc>
+                <a:tc hMerge="1" vMerge="1">
+                  <a:txBody>
+                    <a:bodyPr/>
+                    <a:lstStyle/>
+                    <a:p>
+                      <a:endParaRPr lang="ru-RU" dirty="0"/>
+                    </a:p>
+                  </a:txBody>
+                  <a:tcPr/>
+                </a:tc>
+                <a:tc>
+                  <a:txBody>
+                    <a:bodyPr/>
+                    <a:lstStyle/>
+                    <a:p>
+                      <a:pPr algn="ctr"/>
+                      <a:r>
+                        <a:rPr lang="en-US" dirty="0"/>
+                        <a:t>Cat</a:t>
+                      </a:r>
+                      <a:endParaRPr lang="ru-RU" dirty="0"/>
+                    </a:p>
+                  </a:txBody>
+                  <a:tcPr>
+                    <a:solidFill>
+                      <a:schemeClr val="tx2">
+                        <a:lumMod val="25000"/>
+                        <a:lumOff val="75000"/>
+                      </a:schemeClr>
+                    </a:solidFill>
+                  </a:tcPr>
+                </a:tc>
+                <a:tc>
+                  <a:txBody>
+                    <a:bodyPr/>
+                    <a:lstStyle/>
+                    <a:p>
+                      <a:pPr algn="ctr"/>
+                      <a:r>
+                        <a:rPr lang="en-US" dirty="0"/>
+                        <a:t>Fish</a:t>
+                      </a:r>
+                      <a:endParaRPr lang="ru-RU" dirty="0"/>
+                    </a:p>
+                  </a:txBody>
+                  <a:tcPr>
+                    <a:solidFill>
+                      <a:schemeClr val="tx2">
+                        <a:lumMod val="25000"/>
+                        <a:lumOff val="75000"/>
+                      </a:schemeClr>
+                    </a:solidFill>
+                  </a:tcPr>
+                </a:tc>
+                <a:tc>
+                  <a:txBody>
+                    <a:bodyPr/>
+                    <a:lstStyle/>
+                    <a:p>
+                      <a:pPr algn="ctr"/>
+                      <a:r>
+                        <a:rPr lang="en-US" dirty="0"/>
+                        <a:t>Hen/Chicken</a:t>
+                      </a:r>
+                      <a:endParaRPr lang="ru-RU" dirty="0"/>
+                    </a:p>
+                  </a:txBody>
+                  <a:tcPr>
+                    <a:solidFill>
+                      <a:schemeClr val="tx2">
+                        <a:lumMod val="25000"/>
+                        <a:lumOff val="75000"/>
+                      </a:schemeClr>
+                    </a:solidFill>
+                  </a:tcPr>
+                </a:tc>
+                <a:extLst>
+                  <a:ext uri="{0D108BD9-81ED-4DB2-BD59-A6C34878D82A}">
+                    <a16:rowId xmlns:a16="http://schemas.microsoft.com/office/drawing/2014/main" val="2794040004"/>
+                  </a:ext>
+                </a:extLst>
+              </a:tr>
+              <a:tr h="373397">
+                <a:tc rowSpan="3">
+                  <a:txBody>
+                    <a:bodyPr/>
+                    <a:lstStyle/>
+                    <a:p>
+                      <a:r>
+                        <a:rPr lang="en-US" dirty="0"/>
+                        <a:t>Predicted</a:t>
+                      </a:r>
+                      <a:endParaRPr lang="ru-RU" dirty="0"/>
+                    </a:p>
+                  </a:txBody>
+                  <a:tcPr vert="vert">
+                    <a:solidFill>
+                      <a:schemeClr val="accent2">
+                        <a:lumMod val="40000"/>
+                        <a:lumOff val="60000"/>
+                      </a:schemeClr>
+                    </a:solidFill>
+                  </a:tcPr>
+                </a:tc>
+                <a:tc>
+                  <a:txBody>
+                    <a:bodyPr/>
+                    <a:lstStyle/>
+                    <a:p>
+                      <a:pPr algn="ctr"/>
+                      <a:r>
+                        <a:rPr lang="en-US" dirty="0"/>
+                        <a:t>Cat</a:t>
+                      </a:r>
+                      <a:endParaRPr lang="ru-RU" dirty="0"/>
+                    </a:p>
+                  </a:txBody>
+                  <a:tcPr>
+                    <a:solidFill>
+                      <a:schemeClr val="tx2">
+                        <a:lumMod val="25000"/>
+                        <a:lumOff val="75000"/>
+                      </a:schemeClr>
+                    </a:solidFill>
+                  </a:tcPr>
+                </a:tc>
+                <a:tc>
+                  <a:txBody>
+                    <a:bodyPr/>
+                    <a:lstStyle/>
+                    <a:p>
+                      <a:pPr algn="ctr"/>
+                      <a:r>
+                        <a:rPr lang="en-US" dirty="0"/>
+                        <a:t>990</a:t>
+                      </a:r>
+                      <a:endParaRPr lang="ru-RU" dirty="0"/>
+                    </a:p>
+                  </a:txBody>
+                  <a:tcPr>
+                    <a:solidFill>
+                      <a:schemeClr val="accent6">
+                        <a:lumMod val="40000"/>
+                        <a:lumOff val="60000"/>
+                      </a:schemeClr>
+                    </a:solidFill>
+                  </a:tcPr>
+                </a:tc>
+                <a:tc>
+                  <a:txBody>
+                    <a:bodyPr/>
+                    <a:lstStyle/>
+                    <a:p>
+                      <a:pPr algn="ctr"/>
+                      <a:r>
+                        <a:rPr lang="ru-RU" dirty="0"/>
+                        <a:t>5</a:t>
+                      </a:r>
+                    </a:p>
+                  </a:txBody>
+                  <a:tcPr>
+                    <a:solidFill>
+                      <a:schemeClr val="accent2">
+                        <a:lumMod val="20000"/>
+                        <a:lumOff val="80000"/>
+                      </a:schemeClr>
+                    </a:solidFill>
+                  </a:tcPr>
+                </a:tc>
+                <a:tc>
+                  <a:txBody>
+                    <a:bodyPr/>
+                    <a:lstStyle/>
+                    <a:p>
+                      <a:pPr algn="ctr"/>
+                      <a:r>
+                        <a:rPr lang="ru-RU" dirty="0"/>
+                        <a:t>6</a:t>
+                      </a:r>
+                      <a:r>
+                        <a:rPr lang="en-US" dirty="0"/>
+                        <a:t>0</a:t>
+                      </a:r>
+                      <a:endParaRPr lang="ru-RU" dirty="0"/>
+                    </a:p>
+                  </a:txBody>
+                  <a:tcPr>
+                    <a:solidFill>
+                      <a:schemeClr val="accent2">
+                        <a:lumMod val="20000"/>
+                        <a:lumOff val="80000"/>
+                      </a:schemeClr>
+                    </a:solidFill>
+                  </a:tcPr>
+                </a:tc>
+                <a:extLst>
+                  <a:ext uri="{0D108BD9-81ED-4DB2-BD59-A6C34878D82A}">
+                    <a16:rowId xmlns:a16="http://schemas.microsoft.com/office/drawing/2014/main" val="4068183077"/>
+                  </a:ext>
+                </a:extLst>
+              </a:tr>
+              <a:tr h="373397">
+                <a:tc vMerge="1">
+                  <a:txBody>
+                    <a:bodyPr/>
+                    <a:lstStyle/>
+                    <a:p>
+                      <a:endParaRPr lang="ru-RU" dirty="0"/>
+                    </a:p>
+                  </a:txBody>
+                  <a:tcPr/>
+                </a:tc>
+                <a:tc>
+                  <a:txBody>
+                    <a:bodyPr/>
+                    <a:lstStyle/>
+                    <a:p>
+                      <a:pPr algn="ctr"/>
+                      <a:r>
+                        <a:rPr lang="en-US" dirty="0"/>
+                        <a:t>Fish</a:t>
+                      </a:r>
+                      <a:endParaRPr lang="ru-RU" dirty="0"/>
+                    </a:p>
+                  </a:txBody>
+                  <a:tcPr>
+                    <a:solidFill>
+                      <a:schemeClr val="tx2">
+                        <a:lumMod val="25000"/>
+                        <a:lumOff val="75000"/>
+                      </a:schemeClr>
+                    </a:solidFill>
+                  </a:tcPr>
+                </a:tc>
+                <a:tc>
+                  <a:txBody>
+                    <a:bodyPr/>
+                    <a:lstStyle/>
+                    <a:p>
+                      <a:pPr algn="ctr"/>
+                      <a:r>
+                        <a:rPr lang="ru-RU" dirty="0"/>
+                        <a:t>10</a:t>
+                      </a:r>
+                    </a:p>
+                  </a:txBody>
+                  <a:tcPr>
+                    <a:solidFill>
+                      <a:schemeClr val="accent2">
+                        <a:lumMod val="20000"/>
+                        <a:lumOff val="80000"/>
+                      </a:schemeClr>
+                    </a:solidFill>
+                  </a:tcPr>
+                </a:tc>
+                <a:tc>
+                  <a:txBody>
+                    <a:bodyPr/>
+                    <a:lstStyle/>
+                    <a:p>
+                      <a:pPr algn="ctr"/>
+                      <a:r>
+                        <a:rPr lang="en-US" dirty="0"/>
+                        <a:t>890</a:t>
+                      </a:r>
+                      <a:endParaRPr lang="ru-RU" dirty="0"/>
+                    </a:p>
+                  </a:txBody>
+                  <a:tcPr>
+                    <a:solidFill>
+                      <a:schemeClr val="accent6">
+                        <a:lumMod val="40000"/>
+                        <a:lumOff val="60000"/>
+                      </a:schemeClr>
+                    </a:solidFill>
+                  </a:tcPr>
+                </a:tc>
+                <a:tc>
+                  <a:txBody>
+                    <a:bodyPr/>
+                    <a:lstStyle/>
+                    <a:p>
+                      <a:pPr algn="ctr"/>
+                      <a:r>
+                        <a:rPr lang="ru-RU" dirty="0"/>
+                        <a:t>10</a:t>
+                      </a:r>
+                    </a:p>
+                  </a:txBody>
+                  <a:tcPr>
+                    <a:solidFill>
+                      <a:schemeClr val="accent2">
+                        <a:lumMod val="20000"/>
+                        <a:lumOff val="80000"/>
+                      </a:schemeClr>
+                    </a:solidFill>
+                  </a:tcPr>
+                </a:tc>
+                <a:extLst>
+                  <a:ext uri="{0D108BD9-81ED-4DB2-BD59-A6C34878D82A}">
+                    <a16:rowId xmlns:a16="http://schemas.microsoft.com/office/drawing/2014/main" val="3380102428"/>
+                  </a:ext>
+                </a:extLst>
+              </a:tr>
+              <a:tr h="373397">
+                <a:tc vMerge="1">
+                  <a:txBody>
+                    <a:bodyPr/>
+                    <a:lstStyle/>
+                    <a:p>
+                      <a:endParaRPr lang="ru-RU" dirty="0"/>
+                    </a:p>
+                  </a:txBody>
+                  <a:tcPr/>
+                </a:tc>
+                <a:tc>
+                  <a:txBody>
+                    <a:bodyPr/>
+                    <a:lstStyle/>
+                    <a:p>
+                      <a:pPr marL="0" marR="0" lvl="0" indent="0" algn="ctr" defTabSz="914400" rtl="0" eaLnBrk="1" fontAlgn="auto" latinLnBrk="0" hangingPunct="1">
+                        <a:lnSpc>
+                          <a:spcPct val="100000"/>
+                        </a:lnSpc>
+                        <a:spcBef>
+                          <a:spcPts val="0"/>
+                        </a:spcBef>
+                        <a:spcAft>
+                          <a:spcPts val="0"/>
+                        </a:spcAft>
+                        <a:buClrTx/>
+                        <a:buSzTx/>
+                        <a:buFontTx/>
+                        <a:buNone/>
+                        <a:tabLst/>
+                        <a:defRPr/>
+                      </a:pPr>
+                      <a:r>
+                        <a:rPr lang="en-US" dirty="0"/>
+                        <a:t>Hen/Chicken</a:t>
+                      </a:r>
+                      <a:endParaRPr lang="ru-RU" dirty="0"/>
+                    </a:p>
+                  </a:txBody>
+                  <a:tcPr>
+                    <a:solidFill>
+                      <a:schemeClr val="tx2">
+                        <a:lumMod val="25000"/>
+                        <a:lumOff val="75000"/>
+                      </a:schemeClr>
+                    </a:solidFill>
+                  </a:tcPr>
+                </a:tc>
+                <a:tc>
+                  <a:txBody>
+                    <a:bodyPr/>
+                    <a:lstStyle/>
+                    <a:p>
+                      <a:pPr algn="ctr"/>
+                      <a:r>
+                        <a:rPr lang="ru-RU" dirty="0"/>
+                        <a:t>0</a:t>
+                      </a:r>
+                    </a:p>
+                  </a:txBody>
+                  <a:tcPr>
+                    <a:solidFill>
+                      <a:schemeClr val="accent2">
+                        <a:lumMod val="20000"/>
+                        <a:lumOff val="80000"/>
+                      </a:schemeClr>
+                    </a:solidFill>
+                  </a:tcPr>
+                </a:tc>
+                <a:tc>
+                  <a:txBody>
+                    <a:bodyPr/>
+                    <a:lstStyle/>
+                    <a:p>
+                      <a:pPr algn="ctr"/>
+                      <a:r>
+                        <a:rPr lang="ru-RU" dirty="0"/>
+                        <a:t>5</a:t>
+                      </a:r>
+                    </a:p>
+                  </a:txBody>
+                  <a:tcPr>
+                    <a:solidFill>
+                      <a:schemeClr val="accent2">
+                        <a:lumMod val="20000"/>
+                        <a:lumOff val="80000"/>
+                      </a:schemeClr>
+                    </a:solidFill>
+                  </a:tcPr>
+                </a:tc>
+                <a:tc>
+                  <a:txBody>
+                    <a:bodyPr/>
+                    <a:lstStyle/>
+                    <a:p>
+                      <a:pPr algn="ctr"/>
+                      <a:r>
+                        <a:rPr lang="en-US" dirty="0"/>
+                        <a:t>30</a:t>
+                      </a:r>
+                      <a:endParaRPr lang="ru-RU" dirty="0"/>
+                    </a:p>
+                  </a:txBody>
+                  <a:tcPr>
+                    <a:solidFill>
+                      <a:schemeClr val="accent6">
+                        <a:lumMod val="40000"/>
+                        <a:lumOff val="60000"/>
+                      </a:schemeClr>
+                    </a:solidFill>
+                  </a:tcPr>
+                </a:tc>
+                <a:extLst>
+                  <a:ext uri="{0D108BD9-81ED-4DB2-BD59-A6C34878D82A}">
+                    <a16:rowId xmlns:a16="http://schemas.microsoft.com/office/drawing/2014/main" val="2057127754"/>
+                  </a:ext>
+                </a:extLst>
+              </a:tr>
+            </a:tbl>
+          </a:graphicData>
+        </a:graphic>
+      </p:graphicFrame>
+    </p:spTree>
+    <p:extLst>
+      <p:ext uri="{BB962C8B-B14F-4D97-AF65-F5344CB8AC3E}">
+        <p14:creationId xmlns:p14="http://schemas.microsoft.com/office/powerpoint/2010/main" val="150995320"/>
+      </p:ext>
+    </p:extLst>
+  </p:cSld>
+  <p:clrMapOvr>
+    <a:masterClrMapping/>
+  </p:clrMapOvr>
+</p:sld>
+</file>
+
+<file path=ppt/slides/slide22.xml><?xml version="1.0" encoding="utf-8"?>
+<p:sld xmlns:a="http://schemas.openxmlformats.org/drawingml/2006/main" xmlns:r="http://schemas.openxmlformats.org/officeDocument/2006/relationships" xmlns:p="http://schemas.openxmlformats.org/presentationml/2006/main">
+  <p:cSld>
+    <p:spTree>
+      <p:nvGrpSpPr>
+        <p:cNvPr id="1" name="">
+          <a:extLst>
+            <a:ext uri="{FF2B5EF4-FFF2-40B4-BE49-F238E27FC236}">
+              <a16:creationId xmlns:a16="http://schemas.microsoft.com/office/drawing/2014/main" id="{33833AC0-CF87-9EBB-A83B-69C95BA38A99}"/>
+            </a:ext>
+          </a:extLst>
+        </p:cNvPr>
+        <p:cNvGrpSpPr/>
+        <p:nvPr/>
+      </p:nvGrpSpPr>
+      <p:grpSpPr>
+        <a:xfrm>
+          <a:off x="0" y="0"/>
+          <a:ext cx="0" cy="0"/>
+          <a:chOff x="0" y="0"/>
+          <a:chExt cx="0" cy="0"/>
+        </a:xfrm>
+      </p:grpSpPr>
+      <p:sp>
+        <p:nvSpPr>
+          <p:cNvPr id="8" name="Заголовок 1">
+            <a:extLst>
+              <a:ext uri="{FF2B5EF4-FFF2-40B4-BE49-F238E27FC236}">
+                <a16:creationId xmlns:a16="http://schemas.microsoft.com/office/drawing/2014/main" id="{A5A063EE-8464-2C8B-81D8-A34B8AB99E54}"/>
+              </a:ext>
+            </a:extLst>
+          </p:cNvPr>
+          <p:cNvSpPr txBox="1">
+            <a:spLocks/>
+          </p:cNvSpPr>
+          <p:nvPr/>
+        </p:nvSpPr>
+        <p:spPr>
+          <a:xfrm>
+            <a:off x="990600" y="297606"/>
+            <a:ext cx="10515600" cy="1325563"/>
+          </a:xfrm>
+          <a:prstGeom prst="rect">
+            <a:avLst/>
+          </a:prstGeom>
+        </p:spPr>
+        <p:txBody>
+          <a:bodyPr vert="horz" lIns="91440" tIns="45720" rIns="91440" bIns="45720" rtlCol="0" anchor="ctr">
+            <a:normAutofit/>
+          </a:bodyPr>
+          <a:lstStyle>
+            <a:lvl1pPr algn="l" defTabSz="914400" rtl="0" eaLnBrk="1" latinLnBrk="0" hangingPunct="1">
+              <a:lnSpc>
+                <a:spcPct val="90000"/>
+              </a:lnSpc>
+              <a:spcBef>
+                <a:spcPct val="0"/>
+              </a:spcBef>
+              <a:buNone/>
+              <a:defRPr sz="4400" kern="1200">
+                <a:solidFill>
+                  <a:schemeClr val="tx1"/>
+                </a:solidFill>
+                <a:latin typeface="+mj-lt"/>
+                <a:ea typeface="+mj-ea"/>
+                <a:cs typeface="+mj-cs"/>
+              </a:defRPr>
+            </a:lvl1pPr>
+          </a:lstStyle>
+          <a:p>
+            <a:r>
+              <a:rPr lang="ru-RU" b="1" dirty="0">
+                <a:solidFill>
+                  <a:srgbClr val="000000"/>
+                </a:solidFill>
+                <a:latin typeface="Helvetica" pitchFamily="2" charset="0"/>
+              </a:rPr>
+              <a:t>Метрики </a:t>
+            </a:r>
+            <a:r>
+              <a:rPr lang="ru-RU" b="1" dirty="0" err="1">
+                <a:solidFill>
+                  <a:srgbClr val="000000"/>
+                </a:solidFill>
+                <a:latin typeface="Helvetica" pitchFamily="2" charset="0"/>
+              </a:rPr>
+              <a:t>многоклассовой</a:t>
+            </a:r>
+            <a:r>
+              <a:rPr lang="ru-RU" b="1" dirty="0">
+                <a:solidFill>
+                  <a:srgbClr val="000000"/>
+                </a:solidFill>
+                <a:latin typeface="Helvetica" pitchFamily="2" charset="0"/>
+              </a:rPr>
+              <a:t> классификации</a:t>
+            </a:r>
+          </a:p>
+        </p:txBody>
+      </p:sp>
+      <p:graphicFrame>
+        <p:nvGraphicFramePr>
+          <p:cNvPr id="16" name="Таблица 15">
+            <a:extLst>
+              <a:ext uri="{FF2B5EF4-FFF2-40B4-BE49-F238E27FC236}">
+                <a16:creationId xmlns:a16="http://schemas.microsoft.com/office/drawing/2014/main" id="{1CD0850E-02F3-C81C-D783-8917CB883EA0}"/>
+              </a:ext>
+            </a:extLst>
+          </p:cNvPr>
+          <p:cNvGraphicFramePr>
+            <a:graphicFrameLocks noGrp="1"/>
+          </p:cNvGraphicFramePr>
+          <p:nvPr>
+            <p:extLst>
+              <p:ext uri="{D42A27DB-BD31-4B8C-83A1-F6EECF244321}">
+                <p14:modId xmlns:p14="http://schemas.microsoft.com/office/powerpoint/2010/main" val="53079780"/>
+              </p:ext>
+            </p:extLst>
+          </p:nvPr>
+        </p:nvGraphicFramePr>
+        <p:xfrm>
+          <a:off x="117677" y="4740187"/>
+          <a:ext cx="11956646" cy="1142331"/>
+        </p:xfrm>
+        <a:graphic>
+          <a:graphicData uri="http://schemas.openxmlformats.org/drawingml/2006/table">
+            <a:tbl>
+              <a:tblPr firstRow="1" bandRow="1">
+                <a:tableStyleId>{2D5ABB26-0587-4C30-8999-92F81FD0307C}</a:tableStyleId>
+              </a:tblPr>
+              <a:tblGrid>
+                <a:gridCol w="1936640">
+                  <a:extLst>
+                    <a:ext uri="{9D8B030D-6E8A-4147-A177-3AD203B41FA5}">
+                      <a16:colId xmlns:a16="http://schemas.microsoft.com/office/drawing/2014/main" val="3701492871"/>
+                    </a:ext>
+                  </a:extLst>
+                </a:gridCol>
+                <a:gridCol w="3340002">
+                  <a:extLst>
+                    <a:ext uri="{9D8B030D-6E8A-4147-A177-3AD203B41FA5}">
+                      <a16:colId xmlns:a16="http://schemas.microsoft.com/office/drawing/2014/main" val="3331177459"/>
+                    </a:ext>
+                  </a:extLst>
+                </a:gridCol>
+                <a:gridCol w="3340002">
+                  <a:extLst>
+                    <a:ext uri="{9D8B030D-6E8A-4147-A177-3AD203B41FA5}">
+                      <a16:colId xmlns:a16="http://schemas.microsoft.com/office/drawing/2014/main" val="2255886704"/>
+                    </a:ext>
+                  </a:extLst>
+                </a:gridCol>
+                <a:gridCol w="3340002">
+                  <a:extLst>
+                    <a:ext uri="{9D8B030D-6E8A-4147-A177-3AD203B41FA5}">
+                      <a16:colId xmlns:a16="http://schemas.microsoft.com/office/drawing/2014/main" val="1334793108"/>
+                    </a:ext>
+                  </a:extLst>
+                </a:gridCol>
+              </a:tblGrid>
+              <a:tr h="235860">
+                <a:tc>
+                  <a:txBody>
+                    <a:bodyPr/>
+                    <a:lstStyle/>
+                    <a:p>
+                      <a:pPr algn="ctr"/>
+                      <a:endParaRPr lang="ru-RU" dirty="0"/>
+                    </a:p>
+                  </a:txBody>
+                  <a:tcPr anchor="ctr"/>
+                </a:tc>
+                <a:tc>
+                  <a:txBody>
+                    <a:bodyPr/>
+                    <a:lstStyle/>
+                    <a:p>
+                      <a:pPr algn="ctr"/>
+                      <a:r>
+                        <a:rPr lang="en-US" sz="1800" b="1" dirty="0"/>
+                        <a:t>micro-avg</a:t>
+                      </a:r>
+                      <a:endParaRPr lang="ru-RU" dirty="0"/>
+                    </a:p>
+                  </a:txBody>
+                  <a:tcPr anchor="ctr"/>
+                </a:tc>
+                <a:tc>
+                  <a:txBody>
+                    <a:bodyPr/>
+                    <a:lstStyle/>
+                    <a:p>
+                      <a:pPr algn="ctr"/>
+                      <a:r>
+                        <a:rPr lang="en-US" sz="1800" b="1" dirty="0"/>
+                        <a:t>macro-avg</a:t>
+                      </a:r>
+                      <a:endParaRPr lang="ru-RU" dirty="0"/>
+                    </a:p>
+                  </a:txBody>
+                  <a:tcPr anchor="ctr"/>
+                </a:tc>
+                <a:tc>
+                  <a:txBody>
+                    <a:bodyPr/>
+                    <a:lstStyle/>
+                    <a:p>
+                      <a:pPr algn="ctr"/>
+                      <a:r>
+                        <a:rPr lang="en-US" sz="1800" b="1" dirty="0"/>
+                        <a:t>weighted-avg</a:t>
+                      </a:r>
+                      <a:endParaRPr lang="ru-RU" dirty="0"/>
+                    </a:p>
+                  </a:txBody>
+                  <a:tcPr anchor="ctr"/>
+                </a:tc>
+                <a:extLst>
+                  <a:ext uri="{0D108BD9-81ED-4DB2-BD59-A6C34878D82A}">
+                    <a16:rowId xmlns:a16="http://schemas.microsoft.com/office/drawing/2014/main" val="2102661795"/>
+                  </a:ext>
+                </a:extLst>
+              </a:tr>
+              <a:tr h="776571">
+                <a:tc>
+                  <a:txBody>
+                    <a:bodyPr/>
+                    <a:lstStyle/>
+                    <a:p>
+                      <a:pPr algn="ctr"/>
+                      <a:r>
+                        <a:rPr lang="en-US" b="1" dirty="0"/>
+                        <a:t>f1</a:t>
+                      </a:r>
+                      <a:endParaRPr lang="ru-RU" b="1" dirty="0"/>
+                    </a:p>
+                  </a:txBody>
+                  <a:tcPr anchor="ctr"/>
+                </a:tc>
+                <a:tc>
+                  <a:txBody>
+                    <a:bodyPr/>
+                    <a:lstStyle/>
+                    <a:p>
+                      <a:pPr algn="ctr"/>
+                      <a:r>
+                        <a:rPr lang="en-US" dirty="0"/>
+                        <a:t>0.94</a:t>
+                      </a:r>
+                      <a:endParaRPr lang="ru-RU" dirty="0"/>
+                    </a:p>
+                  </a:txBody>
+                  <a:tcPr anchor="ctr"/>
+                </a:tc>
+                <a:tc>
+                  <a:txBody>
+                    <a:bodyPr/>
+                    <a:lstStyle/>
+                    <a:p>
+                      <a:pPr algn="ctr"/>
+                      <a:r>
+                        <a:rPr lang="ru-RU" sz="1800" b="0" i="0" u="none" strike="noStrike" kern="1200" dirty="0">
+                          <a:solidFill>
+                            <a:schemeClr val="tx1"/>
+                          </a:solidFill>
+                          <a:effectLst/>
+                          <a:latin typeface="+mn-lt"/>
+                          <a:ea typeface="+mn-ea"/>
+                          <a:cs typeface="+mn-cs"/>
+                        </a:rPr>
+                        <a:t>0.896</a:t>
+                      </a:r>
+                      <a:endParaRPr lang="ru-RU" b="0" dirty="0"/>
+                    </a:p>
+                  </a:txBody>
+                  <a:tcPr anchor="ctr"/>
+                </a:tc>
+                <a:tc>
+                  <a:txBody>
+                    <a:bodyPr/>
+                    <a:lstStyle/>
+                    <a:p>
+                      <a:pPr algn="ctr"/>
+                      <a:r>
+                        <a:rPr lang="ru-RU" sz="1800" b="0" i="0" u="none" strike="noStrike" kern="1200" dirty="0">
+                          <a:solidFill>
+                            <a:schemeClr val="tx1"/>
+                          </a:solidFill>
+                          <a:effectLst/>
+                          <a:latin typeface="+mn-lt"/>
+                          <a:ea typeface="+mn-ea"/>
+                          <a:cs typeface="+mn-cs"/>
+                        </a:rPr>
+                        <a:t>0.941</a:t>
+                      </a:r>
+                      <a:endParaRPr lang="ru-RU" dirty="0"/>
+                    </a:p>
+                  </a:txBody>
+                  <a:tcPr anchor="ctr"/>
+                </a:tc>
+                <a:extLst>
+                  <a:ext uri="{0D108BD9-81ED-4DB2-BD59-A6C34878D82A}">
+                    <a16:rowId xmlns:a16="http://schemas.microsoft.com/office/drawing/2014/main" val="3787964377"/>
+                  </a:ext>
+                </a:extLst>
+              </a:tr>
+            </a:tbl>
+          </a:graphicData>
+        </a:graphic>
+      </p:graphicFrame>
+      <p:sp>
+        <p:nvSpPr>
+          <p:cNvPr id="2" name="TextBox 1">
+            <a:extLst>
+              <a:ext uri="{FF2B5EF4-FFF2-40B4-BE49-F238E27FC236}">
+                <a16:creationId xmlns:a16="http://schemas.microsoft.com/office/drawing/2014/main" id="{8988B383-89EC-0548-6974-6F7AE2735B12}"/>
+              </a:ext>
+            </a:extLst>
+          </p:cNvPr>
+          <p:cNvSpPr txBox="1"/>
+          <p:nvPr/>
+        </p:nvSpPr>
+        <p:spPr>
+          <a:xfrm>
+            <a:off x="990600" y="1933147"/>
+            <a:ext cx="7463903" cy="923330"/>
+          </a:xfrm>
+          <a:prstGeom prst="rect">
+            <a:avLst/>
+          </a:prstGeom>
+          <a:noFill/>
+        </p:spPr>
+        <p:txBody>
+          <a:bodyPr wrap="none" rtlCol="0">
+            <a:spAutoFit/>
+          </a:bodyPr>
+          <a:lstStyle/>
+          <a:p>
+            <a:r>
+              <a:rPr lang="ru-RU" b="1" dirty="0"/>
+              <a:t>Пример:</a:t>
+            </a:r>
+            <a:r>
+              <a:rPr lang="ru-RU" dirty="0"/>
+              <a:t> решаем задачу </a:t>
+            </a:r>
+            <a:r>
+              <a:rPr lang="ru-RU" b="1" dirty="0"/>
+              <a:t>классификации животных</a:t>
+            </a:r>
+            <a:r>
+              <a:rPr lang="ru-RU" dirty="0"/>
+              <a:t> по фотографиям</a:t>
+            </a:r>
+          </a:p>
+          <a:p>
+            <a:endParaRPr lang="ru-RU" dirty="0"/>
+          </a:p>
+          <a:p>
+            <a:r>
+              <a:rPr lang="ru-RU" dirty="0"/>
+              <a:t>Модель </a:t>
+            </a:r>
+            <a:r>
+              <a:rPr lang="en-US" dirty="0"/>
+              <a:t>B</a:t>
+            </a:r>
+            <a:endParaRPr lang="ru-RU" dirty="0"/>
+          </a:p>
+        </p:txBody>
+      </p:sp>
+      <p:graphicFrame>
+        <p:nvGraphicFramePr>
+          <p:cNvPr id="3" name="Таблица 2">
+            <a:extLst>
+              <a:ext uri="{FF2B5EF4-FFF2-40B4-BE49-F238E27FC236}">
+                <a16:creationId xmlns:a16="http://schemas.microsoft.com/office/drawing/2014/main" id="{37289ADB-9482-6508-4CA4-B0B9ADE5812B}"/>
+              </a:ext>
+            </a:extLst>
+          </p:cNvPr>
+          <p:cNvGraphicFramePr>
+            <a:graphicFrameLocks noGrp="1"/>
+          </p:cNvGraphicFramePr>
+          <p:nvPr>
+            <p:extLst>
+              <p:ext uri="{D42A27DB-BD31-4B8C-83A1-F6EECF244321}">
+                <p14:modId xmlns:p14="http://schemas.microsoft.com/office/powerpoint/2010/main" val="3197431701"/>
+              </p:ext>
+            </p:extLst>
+          </p:nvPr>
+        </p:nvGraphicFramePr>
+        <p:xfrm>
+          <a:off x="990600" y="2394812"/>
+          <a:ext cx="6516547" cy="1866985"/>
+        </p:xfrm>
+        <a:graphic>
+          <a:graphicData uri="http://schemas.openxmlformats.org/drawingml/2006/table">
+            <a:tbl>
+              <a:tblPr firstRow="1" bandRow="1">
+                <a:tableStyleId>{2D5ABB26-0587-4C30-8999-92F81FD0307C}</a:tableStyleId>
+              </a:tblPr>
+              <a:tblGrid>
+                <a:gridCol w="473274">
+                  <a:extLst>
+                    <a:ext uri="{9D8B030D-6E8A-4147-A177-3AD203B41FA5}">
+                      <a16:colId xmlns:a16="http://schemas.microsoft.com/office/drawing/2014/main" val="3132335557"/>
+                    </a:ext>
+                  </a:extLst>
+                </a:gridCol>
+                <a:gridCol w="1589203">
+                  <a:extLst>
+                    <a:ext uri="{9D8B030D-6E8A-4147-A177-3AD203B41FA5}">
+                      <a16:colId xmlns:a16="http://schemas.microsoft.com/office/drawing/2014/main" val="2334201043"/>
+                    </a:ext>
+                  </a:extLst>
+                </a:gridCol>
+                <a:gridCol w="1484690">
+                  <a:extLst>
+                    <a:ext uri="{9D8B030D-6E8A-4147-A177-3AD203B41FA5}">
+                      <a16:colId xmlns:a16="http://schemas.microsoft.com/office/drawing/2014/main" val="525456860"/>
+                    </a:ext>
+                  </a:extLst>
+                </a:gridCol>
+                <a:gridCol w="1484690">
+                  <a:extLst>
+                    <a:ext uri="{9D8B030D-6E8A-4147-A177-3AD203B41FA5}">
+                      <a16:colId xmlns:a16="http://schemas.microsoft.com/office/drawing/2014/main" val="1832214923"/>
+                    </a:ext>
+                  </a:extLst>
+                </a:gridCol>
+                <a:gridCol w="1484690">
+                  <a:extLst>
+                    <a:ext uri="{9D8B030D-6E8A-4147-A177-3AD203B41FA5}">
+                      <a16:colId xmlns:a16="http://schemas.microsoft.com/office/drawing/2014/main" val="3330695647"/>
+                    </a:ext>
+                  </a:extLst>
+                </a:gridCol>
+              </a:tblGrid>
+              <a:tr h="373397">
+                <a:tc rowSpan="2" gridSpan="2">
+                  <a:txBody>
+                    <a:bodyPr/>
+                    <a:lstStyle/>
+                    <a:p>
+                      <a:pPr algn="ctr"/>
+                      <a:endParaRPr lang="ru-RU" dirty="0"/>
+                    </a:p>
+                  </a:txBody>
+                  <a:tcPr/>
+                </a:tc>
+                <a:tc rowSpan="2" hMerge="1">
+                  <a:txBody>
+                    <a:bodyPr/>
+                    <a:lstStyle/>
+                    <a:p>
+                      <a:endParaRPr lang="ru-RU" dirty="0"/>
+                    </a:p>
+                  </a:txBody>
+                  <a:tcPr/>
+                </a:tc>
+                <a:tc gridSpan="3">
+                  <a:txBody>
+                    <a:bodyPr/>
+                    <a:lstStyle/>
+                    <a:p>
+                      <a:pPr algn="ctr"/>
+                      <a:r>
+                        <a:rPr lang="en-US" dirty="0"/>
+                        <a:t>True/Actual</a:t>
+                      </a:r>
+                      <a:endParaRPr lang="ru-RU" dirty="0"/>
+                    </a:p>
+                  </a:txBody>
+                  <a:tcPr>
+                    <a:solidFill>
+                      <a:schemeClr val="accent2">
+                        <a:lumMod val="40000"/>
+                        <a:lumOff val="60000"/>
+                      </a:schemeClr>
+                    </a:solidFill>
+                  </a:tcPr>
+                </a:tc>
+                <a:tc hMerge="1">
+                  <a:txBody>
+                    <a:bodyPr/>
+                    <a:lstStyle/>
+                    <a:p>
+                      <a:endParaRPr lang="ru-RU" dirty="0"/>
+                    </a:p>
+                  </a:txBody>
+                  <a:tcPr/>
+                </a:tc>
+                <a:tc hMerge="1">
+                  <a:txBody>
+                    <a:bodyPr/>
+                    <a:lstStyle/>
+                    <a:p>
+                      <a:endParaRPr lang="ru-RU" dirty="0"/>
+                    </a:p>
+                  </a:txBody>
+                  <a:tcPr/>
+                </a:tc>
+                <a:extLst>
+                  <a:ext uri="{0D108BD9-81ED-4DB2-BD59-A6C34878D82A}">
+                    <a16:rowId xmlns:a16="http://schemas.microsoft.com/office/drawing/2014/main" val="3228017801"/>
+                  </a:ext>
+                </a:extLst>
+              </a:tr>
+              <a:tr h="373397">
+                <a:tc gridSpan="2" vMerge="1">
+                  <a:txBody>
+                    <a:bodyPr/>
+                    <a:lstStyle/>
+                    <a:p>
+                      <a:endParaRPr lang="ru-RU" dirty="0"/>
+                    </a:p>
+                  </a:txBody>
+                  <a:tcPr/>
+                </a:tc>
+                <a:tc hMerge="1" vMerge="1">
+                  <a:txBody>
+                    <a:bodyPr/>
+                    <a:lstStyle/>
+                    <a:p>
+                      <a:endParaRPr lang="ru-RU" dirty="0"/>
+                    </a:p>
+                  </a:txBody>
+                  <a:tcPr/>
+                </a:tc>
+                <a:tc>
+                  <a:txBody>
+                    <a:bodyPr/>
+                    <a:lstStyle/>
+                    <a:p>
+                      <a:pPr algn="ctr"/>
+                      <a:r>
+                        <a:rPr lang="en-US" dirty="0"/>
+                        <a:t>Cat</a:t>
+                      </a:r>
+                      <a:endParaRPr lang="ru-RU" dirty="0"/>
+                    </a:p>
+                  </a:txBody>
+                  <a:tcPr>
+                    <a:solidFill>
+                      <a:schemeClr val="tx2">
+                        <a:lumMod val="25000"/>
+                        <a:lumOff val="75000"/>
+                      </a:schemeClr>
+                    </a:solidFill>
+                  </a:tcPr>
+                </a:tc>
+                <a:tc>
+                  <a:txBody>
+                    <a:bodyPr/>
+                    <a:lstStyle/>
+                    <a:p>
+                      <a:pPr algn="ctr"/>
+                      <a:r>
+                        <a:rPr lang="en-US" dirty="0"/>
+                        <a:t>Fish</a:t>
+                      </a:r>
+                      <a:endParaRPr lang="ru-RU" dirty="0"/>
+                    </a:p>
+                  </a:txBody>
+                  <a:tcPr>
+                    <a:solidFill>
+                      <a:schemeClr val="tx2">
+                        <a:lumMod val="25000"/>
+                        <a:lumOff val="75000"/>
+                      </a:schemeClr>
+                    </a:solidFill>
+                  </a:tcPr>
+                </a:tc>
+                <a:tc>
+                  <a:txBody>
+                    <a:bodyPr/>
+                    <a:lstStyle/>
+                    <a:p>
+                      <a:pPr algn="ctr"/>
+                      <a:r>
+                        <a:rPr lang="en-US" dirty="0"/>
+                        <a:t>Hen/Chicken</a:t>
+                      </a:r>
+                      <a:endParaRPr lang="ru-RU" dirty="0"/>
+                    </a:p>
+                  </a:txBody>
+                  <a:tcPr>
+                    <a:solidFill>
+                      <a:schemeClr val="tx2">
+                        <a:lumMod val="25000"/>
+                        <a:lumOff val="75000"/>
+                      </a:schemeClr>
+                    </a:solidFill>
+                  </a:tcPr>
+                </a:tc>
+                <a:extLst>
+                  <a:ext uri="{0D108BD9-81ED-4DB2-BD59-A6C34878D82A}">
+                    <a16:rowId xmlns:a16="http://schemas.microsoft.com/office/drawing/2014/main" val="2794040004"/>
+                  </a:ext>
+                </a:extLst>
+              </a:tr>
+              <a:tr h="373397">
+                <a:tc rowSpan="3">
+                  <a:txBody>
+                    <a:bodyPr/>
+                    <a:lstStyle/>
+                    <a:p>
+                      <a:r>
+                        <a:rPr lang="en-US" dirty="0"/>
+                        <a:t>Predicted</a:t>
+                      </a:r>
+                      <a:endParaRPr lang="ru-RU" dirty="0"/>
+                    </a:p>
+                  </a:txBody>
+                  <a:tcPr vert="vert">
+                    <a:solidFill>
+                      <a:schemeClr val="accent2">
+                        <a:lumMod val="40000"/>
+                        <a:lumOff val="60000"/>
+                      </a:schemeClr>
+                    </a:solidFill>
+                  </a:tcPr>
+                </a:tc>
+                <a:tc>
+                  <a:txBody>
+                    <a:bodyPr/>
+                    <a:lstStyle/>
+                    <a:p>
+                      <a:pPr algn="ctr"/>
+                      <a:r>
+                        <a:rPr lang="en-US" dirty="0"/>
+                        <a:t>Cat</a:t>
+                      </a:r>
+                      <a:endParaRPr lang="ru-RU" dirty="0"/>
+                    </a:p>
+                  </a:txBody>
+                  <a:tcPr>
+                    <a:solidFill>
+                      <a:schemeClr val="tx2">
+                        <a:lumMod val="25000"/>
+                        <a:lumOff val="75000"/>
+                      </a:schemeClr>
+                    </a:solidFill>
+                  </a:tcPr>
+                </a:tc>
+                <a:tc>
+                  <a:txBody>
+                    <a:bodyPr/>
+                    <a:lstStyle/>
+                    <a:p>
+                      <a:pPr algn="ctr"/>
+                      <a:r>
+                        <a:rPr lang="en-US" dirty="0"/>
+                        <a:t>9</a:t>
+                      </a:r>
+                      <a:r>
+                        <a:rPr lang="ru-RU" dirty="0"/>
+                        <a:t>40</a:t>
+                      </a:r>
+                    </a:p>
+                  </a:txBody>
+                  <a:tcPr>
+                    <a:solidFill>
+                      <a:schemeClr val="accent6">
+                        <a:lumMod val="40000"/>
+                        <a:lumOff val="60000"/>
+                      </a:schemeClr>
+                    </a:solidFill>
+                  </a:tcPr>
+                </a:tc>
+                <a:tc>
+                  <a:txBody>
+                    <a:bodyPr/>
+                    <a:lstStyle/>
+                    <a:p>
+                      <a:pPr algn="ctr"/>
+                      <a:r>
+                        <a:rPr lang="ru-RU" dirty="0"/>
+                        <a:t>30</a:t>
+                      </a:r>
+                    </a:p>
+                  </a:txBody>
+                  <a:tcPr>
+                    <a:solidFill>
+                      <a:schemeClr val="accent2">
+                        <a:lumMod val="20000"/>
+                        <a:lumOff val="80000"/>
+                      </a:schemeClr>
+                    </a:solidFill>
+                  </a:tcPr>
+                </a:tc>
+                <a:tc>
+                  <a:txBody>
+                    <a:bodyPr/>
+                    <a:lstStyle/>
+                    <a:p>
+                      <a:pPr algn="ctr"/>
+                      <a:r>
+                        <a:rPr lang="ru-RU" dirty="0"/>
+                        <a:t>1</a:t>
+                      </a:r>
+                      <a:r>
+                        <a:rPr lang="en-US" dirty="0"/>
+                        <a:t>0</a:t>
+                      </a:r>
+                      <a:endParaRPr lang="ru-RU" dirty="0"/>
+                    </a:p>
+                  </a:txBody>
+                  <a:tcPr>
+                    <a:solidFill>
+                      <a:schemeClr val="accent2">
+                        <a:lumMod val="20000"/>
+                        <a:lumOff val="80000"/>
+                      </a:schemeClr>
+                    </a:solidFill>
+                  </a:tcPr>
+                </a:tc>
+                <a:extLst>
+                  <a:ext uri="{0D108BD9-81ED-4DB2-BD59-A6C34878D82A}">
+                    <a16:rowId xmlns:a16="http://schemas.microsoft.com/office/drawing/2014/main" val="4068183077"/>
+                  </a:ext>
+                </a:extLst>
+              </a:tr>
+              <a:tr h="373397">
+                <a:tc vMerge="1">
+                  <a:txBody>
+                    <a:bodyPr/>
+                    <a:lstStyle/>
+                    <a:p>
+                      <a:endParaRPr lang="ru-RU" dirty="0"/>
+                    </a:p>
+                  </a:txBody>
+                  <a:tcPr/>
+                </a:tc>
+                <a:tc>
+                  <a:txBody>
+                    <a:bodyPr/>
+                    <a:lstStyle/>
+                    <a:p>
+                      <a:pPr algn="ctr"/>
+                      <a:r>
+                        <a:rPr lang="en-US" dirty="0"/>
+                        <a:t>Fish</a:t>
+                      </a:r>
+                      <a:endParaRPr lang="ru-RU" dirty="0"/>
+                    </a:p>
+                  </a:txBody>
+                  <a:tcPr>
+                    <a:solidFill>
+                      <a:schemeClr val="tx2">
+                        <a:lumMod val="25000"/>
+                        <a:lumOff val="75000"/>
+                      </a:schemeClr>
+                    </a:solidFill>
+                  </a:tcPr>
+                </a:tc>
+                <a:tc>
+                  <a:txBody>
+                    <a:bodyPr/>
+                    <a:lstStyle/>
+                    <a:p>
+                      <a:pPr algn="ctr"/>
+                      <a:r>
+                        <a:rPr lang="ru-RU" dirty="0"/>
+                        <a:t>40</a:t>
+                      </a:r>
+                    </a:p>
+                  </a:txBody>
+                  <a:tcPr>
+                    <a:solidFill>
+                      <a:schemeClr val="accent2">
+                        <a:lumMod val="20000"/>
+                        <a:lumOff val="80000"/>
+                      </a:schemeClr>
+                    </a:solidFill>
+                  </a:tcPr>
+                </a:tc>
+                <a:tc>
+                  <a:txBody>
+                    <a:bodyPr/>
+                    <a:lstStyle/>
+                    <a:p>
+                      <a:pPr algn="ctr"/>
+                      <a:r>
+                        <a:rPr lang="en-US" dirty="0"/>
+                        <a:t>8</a:t>
+                      </a:r>
+                      <a:r>
+                        <a:rPr lang="ru-RU" dirty="0"/>
+                        <a:t>6</a:t>
+                      </a:r>
+                      <a:r>
+                        <a:rPr lang="en-US" dirty="0"/>
+                        <a:t>0</a:t>
+                      </a:r>
+                      <a:endParaRPr lang="ru-RU" dirty="0"/>
+                    </a:p>
+                  </a:txBody>
+                  <a:tcPr>
+                    <a:solidFill>
+                      <a:schemeClr val="accent6">
+                        <a:lumMod val="40000"/>
+                        <a:lumOff val="60000"/>
+                      </a:schemeClr>
+                    </a:solidFill>
+                  </a:tcPr>
+                </a:tc>
+                <a:tc>
+                  <a:txBody>
+                    <a:bodyPr/>
+                    <a:lstStyle/>
+                    <a:p>
+                      <a:pPr algn="ctr"/>
+                      <a:r>
+                        <a:rPr lang="ru-RU" dirty="0"/>
+                        <a:t>10</a:t>
+                      </a:r>
+                    </a:p>
+                  </a:txBody>
+                  <a:tcPr>
+                    <a:solidFill>
+                      <a:schemeClr val="accent2">
+                        <a:lumMod val="20000"/>
+                        <a:lumOff val="80000"/>
+                      </a:schemeClr>
+                    </a:solidFill>
+                  </a:tcPr>
+                </a:tc>
+                <a:extLst>
+                  <a:ext uri="{0D108BD9-81ED-4DB2-BD59-A6C34878D82A}">
+                    <a16:rowId xmlns:a16="http://schemas.microsoft.com/office/drawing/2014/main" val="3380102428"/>
+                  </a:ext>
+                </a:extLst>
+              </a:tr>
+              <a:tr h="373397">
+                <a:tc vMerge="1">
+                  <a:txBody>
+                    <a:bodyPr/>
+                    <a:lstStyle/>
+                    <a:p>
+                      <a:endParaRPr lang="ru-RU" dirty="0"/>
+                    </a:p>
+                  </a:txBody>
+                  <a:tcPr/>
+                </a:tc>
+                <a:tc>
+                  <a:txBody>
+                    <a:bodyPr/>
+                    <a:lstStyle/>
+                    <a:p>
+                      <a:pPr marL="0" marR="0" lvl="0" indent="0" algn="ctr" defTabSz="914400" rtl="0" eaLnBrk="1" fontAlgn="auto" latinLnBrk="0" hangingPunct="1">
+                        <a:lnSpc>
+                          <a:spcPct val="100000"/>
+                        </a:lnSpc>
+                        <a:spcBef>
+                          <a:spcPts val="0"/>
+                        </a:spcBef>
+                        <a:spcAft>
+                          <a:spcPts val="0"/>
+                        </a:spcAft>
+                        <a:buClrTx/>
+                        <a:buSzTx/>
+                        <a:buFontTx/>
+                        <a:buNone/>
+                        <a:tabLst/>
+                        <a:defRPr/>
+                      </a:pPr>
+                      <a:r>
+                        <a:rPr lang="en-US" dirty="0"/>
+                        <a:t>Hen/Chicken</a:t>
+                      </a:r>
+                      <a:endParaRPr lang="ru-RU" dirty="0"/>
+                    </a:p>
+                  </a:txBody>
+                  <a:tcPr>
+                    <a:solidFill>
+                      <a:schemeClr val="tx2">
+                        <a:lumMod val="25000"/>
+                        <a:lumOff val="75000"/>
+                      </a:schemeClr>
+                    </a:solidFill>
+                  </a:tcPr>
+                </a:tc>
+                <a:tc>
+                  <a:txBody>
+                    <a:bodyPr/>
+                    <a:lstStyle/>
+                    <a:p>
+                      <a:pPr algn="ctr"/>
+                      <a:r>
+                        <a:rPr lang="ru-RU" dirty="0"/>
+                        <a:t>20</a:t>
+                      </a:r>
+                    </a:p>
+                  </a:txBody>
+                  <a:tcPr>
+                    <a:solidFill>
+                      <a:schemeClr val="accent2">
+                        <a:lumMod val="20000"/>
+                        <a:lumOff val="80000"/>
+                      </a:schemeClr>
+                    </a:solidFill>
+                  </a:tcPr>
+                </a:tc>
+                <a:tc>
+                  <a:txBody>
+                    <a:bodyPr/>
+                    <a:lstStyle/>
+                    <a:p>
+                      <a:pPr algn="ctr"/>
+                      <a:r>
+                        <a:rPr lang="ru-RU" dirty="0"/>
+                        <a:t>10</a:t>
+                      </a:r>
+                    </a:p>
+                  </a:txBody>
+                  <a:tcPr>
+                    <a:solidFill>
+                      <a:schemeClr val="accent2">
+                        <a:lumMod val="20000"/>
+                        <a:lumOff val="80000"/>
+                      </a:schemeClr>
+                    </a:solidFill>
+                  </a:tcPr>
+                </a:tc>
+                <a:tc>
+                  <a:txBody>
+                    <a:bodyPr/>
+                    <a:lstStyle/>
+                    <a:p>
+                      <a:pPr algn="ctr"/>
+                      <a:r>
+                        <a:rPr lang="ru-RU" dirty="0"/>
+                        <a:t>8</a:t>
+                      </a:r>
+                      <a:r>
+                        <a:rPr lang="en-US" dirty="0"/>
+                        <a:t>0</a:t>
+                      </a:r>
+                      <a:endParaRPr lang="ru-RU" dirty="0"/>
+                    </a:p>
+                  </a:txBody>
+                  <a:tcPr>
+                    <a:solidFill>
+                      <a:schemeClr val="accent6">
+                        <a:lumMod val="40000"/>
+                        <a:lumOff val="60000"/>
+                      </a:schemeClr>
+                    </a:solidFill>
+                  </a:tcPr>
+                </a:tc>
+                <a:extLst>
+                  <a:ext uri="{0D108BD9-81ED-4DB2-BD59-A6C34878D82A}">
+                    <a16:rowId xmlns:a16="http://schemas.microsoft.com/office/drawing/2014/main" val="2057127754"/>
+                  </a:ext>
+                </a:extLst>
+              </a:tr>
+            </a:tbl>
+          </a:graphicData>
+        </a:graphic>
+      </p:graphicFrame>
+    </p:spTree>
+    <p:extLst>
+      <p:ext uri="{BB962C8B-B14F-4D97-AF65-F5344CB8AC3E}">
+        <p14:creationId xmlns:p14="http://schemas.microsoft.com/office/powerpoint/2010/main" val="217076146"/>
+      </p:ext>
+    </p:extLst>
+  </p:cSld>
+  <p:clrMapOvr>
+    <a:masterClrMapping/>
+  </p:clrMapOvr>
+</p:sld>
+</file>
+
+<file path=ppt/slides/slide23.xml><?xml version="1.0" encoding="utf-8"?>
+<p:sld xmlns:a="http://schemas.openxmlformats.org/drawingml/2006/main" xmlns:r="http://schemas.openxmlformats.org/officeDocument/2006/relationships" xmlns:p="http://schemas.openxmlformats.org/presentationml/2006/main">
+  <p:cSld>
+    <p:spTree>
+      <p:nvGrpSpPr>
+        <p:cNvPr id="1" name="">
+          <a:extLst>
+            <a:ext uri="{FF2B5EF4-FFF2-40B4-BE49-F238E27FC236}">
+              <a16:creationId xmlns:a16="http://schemas.microsoft.com/office/drawing/2014/main" id="{D324D23C-FCE0-C833-58F1-1F86E7443E99}"/>
+            </a:ext>
+          </a:extLst>
+        </p:cNvPr>
+        <p:cNvGrpSpPr/>
+        <p:nvPr/>
+      </p:nvGrpSpPr>
+      <p:grpSpPr>
+        <a:xfrm>
+          <a:off x="0" y="0"/>
+          <a:ext cx="0" cy="0"/>
+          <a:chOff x="0" y="0"/>
+          <a:chExt cx="0" cy="0"/>
+        </a:xfrm>
+      </p:grpSpPr>
+      <p:sp>
+        <p:nvSpPr>
+          <p:cNvPr id="8" name="Заголовок 1">
+            <a:extLst>
+              <a:ext uri="{FF2B5EF4-FFF2-40B4-BE49-F238E27FC236}">
+                <a16:creationId xmlns:a16="http://schemas.microsoft.com/office/drawing/2014/main" id="{04412859-3B2E-10B6-57AD-5116CDDA931D}"/>
+              </a:ext>
+            </a:extLst>
+          </p:cNvPr>
+          <p:cNvSpPr txBox="1">
+            <a:spLocks/>
+          </p:cNvSpPr>
+          <p:nvPr/>
+        </p:nvSpPr>
+        <p:spPr>
+          <a:xfrm>
+            <a:off x="990600" y="297606"/>
+            <a:ext cx="10515600" cy="1325563"/>
+          </a:xfrm>
+          <a:prstGeom prst="rect">
+            <a:avLst/>
+          </a:prstGeom>
+        </p:spPr>
+        <p:txBody>
+          <a:bodyPr vert="horz" lIns="91440" tIns="45720" rIns="91440" bIns="45720" rtlCol="0" anchor="ctr">
+            <a:normAutofit/>
+          </a:bodyPr>
+          <a:lstStyle>
+            <a:lvl1pPr algn="l" defTabSz="914400" rtl="0" eaLnBrk="1" latinLnBrk="0" hangingPunct="1">
+              <a:lnSpc>
+                <a:spcPct val="90000"/>
+              </a:lnSpc>
+              <a:spcBef>
+                <a:spcPct val="0"/>
+              </a:spcBef>
+              <a:buNone/>
+              <a:defRPr sz="4400" kern="1200">
+                <a:solidFill>
+                  <a:schemeClr val="tx1"/>
+                </a:solidFill>
+                <a:latin typeface="+mj-lt"/>
+                <a:ea typeface="+mj-ea"/>
+                <a:cs typeface="+mj-cs"/>
+              </a:defRPr>
+            </a:lvl1pPr>
+          </a:lstStyle>
+          <a:p>
+            <a:r>
+              <a:rPr lang="ru-RU" b="1" dirty="0">
+                <a:solidFill>
+                  <a:srgbClr val="000000"/>
+                </a:solidFill>
+                <a:latin typeface="Helvetica" pitchFamily="2" charset="0"/>
+              </a:rPr>
+              <a:t>Метрики </a:t>
+            </a:r>
+            <a:r>
+              <a:rPr lang="ru-RU" b="1" dirty="0" err="1">
+                <a:solidFill>
+                  <a:srgbClr val="000000"/>
+                </a:solidFill>
+                <a:latin typeface="Helvetica" pitchFamily="2" charset="0"/>
+              </a:rPr>
+              <a:t>многоклассовой</a:t>
+            </a:r>
+            <a:r>
+              <a:rPr lang="ru-RU" b="1" dirty="0">
+                <a:solidFill>
+                  <a:srgbClr val="000000"/>
+                </a:solidFill>
+                <a:latin typeface="Helvetica" pitchFamily="2" charset="0"/>
+              </a:rPr>
+              <a:t> классификации</a:t>
+            </a:r>
+          </a:p>
+        </p:txBody>
+      </p:sp>
+      <p:sp>
+        <p:nvSpPr>
+          <p:cNvPr id="2" name="TextBox 1">
+            <a:extLst>
+              <a:ext uri="{FF2B5EF4-FFF2-40B4-BE49-F238E27FC236}">
+                <a16:creationId xmlns:a16="http://schemas.microsoft.com/office/drawing/2014/main" id="{4B550FA7-6E98-2D4D-7F96-D699531BE105}"/>
+              </a:ext>
+            </a:extLst>
+          </p:cNvPr>
+          <p:cNvSpPr txBox="1"/>
+          <p:nvPr/>
+        </p:nvSpPr>
+        <p:spPr>
+          <a:xfrm>
+            <a:off x="990600" y="2071868"/>
+            <a:ext cx="2451633" cy="369332"/>
+          </a:xfrm>
+          <a:prstGeom prst="rect">
+            <a:avLst/>
+          </a:prstGeom>
+          <a:noFill/>
+        </p:spPr>
+        <p:txBody>
+          <a:bodyPr wrap="none" rtlCol="0">
+            <a:spAutoFit/>
+          </a:bodyPr>
+          <a:lstStyle/>
+          <a:p>
+            <a:r>
+              <a:rPr lang="en-US" b="1" dirty="0"/>
+              <a:t>micro-avg = accuracy </a:t>
+            </a:r>
+            <a:endParaRPr lang="ru-RU" dirty="0"/>
+          </a:p>
+        </p:txBody>
+      </p:sp>
+    </p:spTree>
+    <p:extLst>
+      <p:ext uri="{BB962C8B-B14F-4D97-AF65-F5344CB8AC3E}">
+        <p14:creationId xmlns:p14="http://schemas.microsoft.com/office/powerpoint/2010/main" val="757094098"/>
+      </p:ext>
+    </p:extLst>
+  </p:cSld>
+  <p:clrMapOvr>
+    <a:masterClrMapping/>
+  </p:clrMapOvr>
+</p:sld>
+</file>
+
+<file path=ppt/slides/slide24.xml><?xml version="1.0" encoding="utf-8"?>
+<p:sld xmlns:a="http://schemas.openxmlformats.org/drawingml/2006/main" xmlns:r="http://schemas.openxmlformats.org/officeDocument/2006/relationships" xmlns:p="http://schemas.openxmlformats.org/presentationml/2006/main">
+  <p:cSld>
+    <p:spTree>
+      <p:nvGrpSpPr>
+        <p:cNvPr id="1" name="">
+          <a:extLst>
+            <a:ext uri="{FF2B5EF4-FFF2-40B4-BE49-F238E27FC236}">
               <a16:creationId xmlns:a16="http://schemas.microsoft.com/office/drawing/2014/main" id="{C190CAAC-BBF5-ADD1-F09B-A3D0AF1D8A6D}"/>
             </a:ext>
           </a:extLst>
@@ -10101,7 +13297,7 @@
 </p:sld>
 </file>
 
-<file path=ppt/slides/slide21.xml><?xml version="1.0" encoding="utf-8"?>
+<file path=ppt/slides/slide25.xml><?xml version="1.0" encoding="utf-8"?>
 <p:sld xmlns:a="http://schemas.openxmlformats.org/drawingml/2006/main" xmlns:r="http://schemas.openxmlformats.org/officeDocument/2006/relationships" xmlns:p="http://schemas.openxmlformats.org/presentationml/2006/main">
   <p:cSld>
     <p:spTree>
@@ -10298,7 +13494,7 @@
 </p:sld>
 </file>
 
-<file path=ppt/slides/slide22.xml><?xml version="1.0" encoding="utf-8"?>
+<file path=ppt/slides/slide26.xml><?xml version="1.0" encoding="utf-8"?>
 <p:sld xmlns:a="http://schemas.openxmlformats.org/drawingml/2006/main" xmlns:r="http://schemas.openxmlformats.org/officeDocument/2006/relationships" xmlns:p="http://schemas.openxmlformats.org/presentationml/2006/main">
   <p:cSld>
     <p:spTree>
@@ -10430,7 +13626,7 @@
 </p:sld>
 </file>
 
-<file path=ppt/slides/slide23.xml><?xml version="1.0" encoding="utf-8"?>
+<file path=ppt/slides/slide27.xml><?xml version="1.0" encoding="utf-8"?>
 <p:sld xmlns:a="http://schemas.openxmlformats.org/drawingml/2006/main" xmlns:r="http://schemas.openxmlformats.org/officeDocument/2006/relationships" xmlns:p="http://schemas.openxmlformats.org/presentationml/2006/main">
   <p:cSld>
     <p:spTree>
@@ -10536,6 +13732,121 @@
     <p:extLst>
       <p:ext uri="{BB962C8B-B14F-4D97-AF65-F5344CB8AC3E}">
         <p14:creationId xmlns:p14="http://schemas.microsoft.com/office/powerpoint/2010/main" val="3682207228"/>
+      </p:ext>
+    </p:extLst>
+  </p:cSld>
+  <p:clrMapOvr>
+    <a:masterClrMapping/>
+  </p:clrMapOvr>
+</p:sld>
+</file>
+
+<file path=ppt/slides/slide28.xml><?xml version="1.0" encoding="utf-8"?>
+<p:sld xmlns:a="http://schemas.openxmlformats.org/drawingml/2006/main" xmlns:r="http://schemas.openxmlformats.org/officeDocument/2006/relationships" xmlns:p="http://schemas.openxmlformats.org/presentationml/2006/main">
+  <p:cSld>
+    <p:spTree>
+      <p:nvGrpSpPr>
+        <p:cNvPr id="1" name="">
+          <a:extLst>
+            <a:ext uri="{FF2B5EF4-FFF2-40B4-BE49-F238E27FC236}">
+              <a16:creationId xmlns:a16="http://schemas.microsoft.com/office/drawing/2014/main" id="{05FD3E82-1BF0-E35E-E9A6-EE4E867F38CD}"/>
+            </a:ext>
+          </a:extLst>
+        </p:cNvPr>
+        <p:cNvGrpSpPr/>
+        <p:nvPr/>
+      </p:nvGrpSpPr>
+      <p:grpSpPr>
+        <a:xfrm>
+          <a:off x="0" y="0"/>
+          <a:ext cx="0" cy="0"/>
+          <a:chOff x="0" y="0"/>
+          <a:chExt cx="0" cy="0"/>
+        </a:xfrm>
+      </p:grpSpPr>
+      <p:sp>
+        <p:nvSpPr>
+          <p:cNvPr id="2" name="Заголовок 1">
+            <a:extLst>
+              <a:ext uri="{FF2B5EF4-FFF2-40B4-BE49-F238E27FC236}">
+                <a16:creationId xmlns:a16="http://schemas.microsoft.com/office/drawing/2014/main" id="{9921166A-04EB-90E9-9465-6F5720EFDCBB}"/>
+              </a:ext>
+            </a:extLst>
+          </p:cNvPr>
+          <p:cNvSpPr>
+            <a:spLocks noGrp="1"/>
+          </p:cNvSpPr>
+          <p:nvPr>
+            <p:ph type="title"/>
+          </p:nvPr>
+        </p:nvSpPr>
+        <p:spPr/>
+        <p:txBody>
+          <a:bodyPr>
+            <a:normAutofit/>
+          </a:bodyPr>
+          <a:lstStyle/>
+          <a:p>
+            <a:r>
+              <a:rPr lang="ru-RU" b="1" dirty="0">
+                <a:solidFill>
+                  <a:srgbClr val="000000"/>
+                </a:solidFill>
+                <a:effectLst/>
+                <a:latin typeface="Helvetica" pitchFamily="2" charset="0"/>
+              </a:rPr>
+              <a:t>Калибровка вероятностей</a:t>
+            </a:r>
+          </a:p>
+        </p:txBody>
+      </p:sp>
+      <p:sp>
+        <p:nvSpPr>
+          <p:cNvPr id="5" name="Объект 4">
+            <a:extLst>
+              <a:ext uri="{FF2B5EF4-FFF2-40B4-BE49-F238E27FC236}">
+                <a16:creationId xmlns:a16="http://schemas.microsoft.com/office/drawing/2014/main" id="{E62578FE-DB0A-CA12-41D9-148B4770493B}"/>
+              </a:ext>
+            </a:extLst>
+          </p:cNvPr>
+          <p:cNvSpPr>
+            <a:spLocks noGrp="1"/>
+          </p:cNvSpPr>
+          <p:nvPr>
+            <p:ph idx="1"/>
+          </p:nvPr>
+        </p:nvSpPr>
+        <p:spPr>
+          <a:xfrm>
+            <a:off x="838200" y="1825625"/>
+            <a:ext cx="10515600" cy="3806549"/>
+          </a:xfrm>
+        </p:spPr>
+        <p:txBody>
+          <a:bodyPr>
+            <a:normAutofit/>
+          </a:bodyPr>
+          <a:lstStyle/>
+          <a:p>
+            <a:pPr marL="0" indent="0">
+              <a:buNone/>
+            </a:pPr>
+            <a:r>
+              <a:rPr lang="ru-RU" dirty="0"/>
+              <a:t>ноутбук </a:t>
+            </a:r>
+            <a:r>
+              <a:rPr lang="en-US" dirty="0" err="1"/>
+              <a:t>calibration.ipynb</a:t>
+            </a:r>
+            <a:endParaRPr lang="en-US" dirty="0"/>
+          </a:p>
+        </p:txBody>
+      </p:sp>
+    </p:spTree>
+    <p:extLst>
+      <p:ext uri="{BB962C8B-B14F-4D97-AF65-F5344CB8AC3E}">
+        <p14:creationId xmlns:p14="http://schemas.microsoft.com/office/powerpoint/2010/main" val="1874112767"/>
       </p:ext>
     </p:extLst>
   </p:cSld>
@@ -10809,8 +14120,8 @@
           </a:xfrm>
         </p:spPr>
       </p:pic>
-      <mc:AlternateContent xmlns:mc="http://schemas.openxmlformats.org/markup-compatibility/2006">
-        <mc:Choice xmlns:a14="http://schemas.microsoft.com/office/drawing/2010/main" Requires="a14">
+      <mc:AlternateContent xmlns:mc="http://schemas.openxmlformats.org/markup-compatibility/2006" xmlns:a14="http://schemas.microsoft.com/office/drawing/2010/main">
+        <mc:Choice Requires="a14">
           <p:sp>
             <p:nvSpPr>
               <p:cNvPr id="5" name="TextBox 4">
@@ -10839,6 +14150,7 @@
               </a:bodyPr>
               <a:lstStyle/>
               <a:p>
+                <a:pPr/>
                 <a14:m>
                   <m:oMathPara xmlns:m="http://schemas.openxmlformats.org/officeDocument/2006/math">
                     <m:oMathParaPr>
@@ -10917,7 +14229,7 @@
             </p:txBody>
           </p:sp>
         </mc:Choice>
-        <mc:Fallback>
+        <mc:Fallback xmlns="">
           <p:sp>
             <p:nvSpPr>
               <p:cNvPr id="5" name="TextBox 4">
@@ -10962,8 +14274,8 @@
           </p:sp>
         </mc:Fallback>
       </mc:AlternateContent>
-      <mc:AlternateContent xmlns:mc="http://schemas.openxmlformats.org/markup-compatibility/2006">
-        <mc:Choice xmlns:a14="http://schemas.microsoft.com/office/drawing/2010/main" Requires="a14">
+      <mc:AlternateContent xmlns:mc="http://schemas.openxmlformats.org/markup-compatibility/2006" xmlns:a14="http://schemas.microsoft.com/office/drawing/2010/main">
+        <mc:Choice Requires="a14">
           <p:sp>
             <p:nvSpPr>
               <p:cNvPr id="7" name="TextBox 6">
@@ -10992,6 +14304,7 @@
               </a:bodyPr>
               <a:lstStyle/>
               <a:p>
+                <a:pPr/>
                 <a14:m>
                   <m:oMathPara xmlns:m="http://schemas.openxmlformats.org/officeDocument/2006/math">
                     <m:oMathParaPr>
@@ -11180,7 +14493,7 @@
             </p:txBody>
           </p:sp>
         </mc:Choice>
-        <mc:Fallback>
+        <mc:Fallback xmlns="">
           <p:sp>
             <p:nvSpPr>
               <p:cNvPr id="7" name="TextBox 6">
